--- a/Presentazione Progetto Architetture dati.pptx
+++ b/Presentazione Progetto Architetture dati.pptx
@@ -6667,7 +6667,7 @@
             </a:pPr>
             <a:r>
               <a:rPr lang="it" sz="3400" b="1" dirty="0"/>
-              <a:t>Presentazione Esame Architetture dati</a:t>
+              <a:t>Presentazione Esame Architetture Dati</a:t>
             </a:r>
             <a:endParaRPr sz="3400" b="1" dirty="0"/>
           </a:p>
@@ -6688,7 +6688,7 @@
                   </a:extLst>
                 </a:hlinkClick>
               </a:rPr>
-              <a:t>Dataset Degradetion</a:t>
+              <a:t>Dataset Degradation</a:t>
             </a:r>
             <a:endParaRPr sz="3200" b="1" dirty="0">
               <a:solidFill>
@@ -6884,14 +6884,13 @@
         </p:nvPicPr>
         <p:blipFill>
           <a:blip r:embed="rId3"/>
-          <a:stretch>
-            <a:fillRect/>
-          </a:stretch>
+          <a:srcRect/>
+          <a:stretch/>
         </p:blipFill>
         <p:spPr>
           <a:xfrm>
-            <a:off x="4750041" y="70658"/>
-            <a:ext cx="4168486" cy="2501092"/>
+            <a:off x="4682305" y="89598"/>
+            <a:ext cx="4136919" cy="2482151"/>
           </a:xfrm>
           <a:prstGeom prst="rect">
             <a:avLst/>
@@ -6914,14 +6913,13 @@
         </p:nvPicPr>
         <p:blipFill>
           <a:blip r:embed="rId4"/>
-          <a:stretch>
-            <a:fillRect/>
-          </a:stretch>
+          <a:srcRect/>
+          <a:stretch/>
         </p:blipFill>
         <p:spPr>
           <a:xfrm>
-            <a:off x="257042" y="1576151"/>
-            <a:ext cx="4136919" cy="2482151"/>
+            <a:off x="316544" y="1491836"/>
+            <a:ext cx="4136918" cy="2482151"/>
           </a:xfrm>
           <a:prstGeom prst="rect">
             <a:avLst/>
@@ -6944,14 +6942,13 @@
         </p:nvPicPr>
         <p:blipFill>
           <a:blip r:embed="rId5"/>
-          <a:stretch>
-            <a:fillRect/>
-          </a:stretch>
+          <a:srcRect/>
+          <a:stretch/>
         </p:blipFill>
         <p:spPr>
           <a:xfrm>
-            <a:off x="4750039" y="2590691"/>
-            <a:ext cx="4136919" cy="2482151"/>
+            <a:off x="4682303" y="2590691"/>
+            <a:ext cx="4136918" cy="2482151"/>
           </a:xfrm>
           <a:prstGeom prst="rect">
             <a:avLst/>
@@ -7032,7 +7029,7 @@
             </a:pPr>
             <a:r>
               <a:rPr lang="it" sz="2820" dirty="0"/>
-              <a:t>Risultati ripetizioni/missing</a:t>
+              <a:t>Risultati Missing e Duplicati</a:t>
             </a:r>
             <a:endParaRPr sz="2820" dirty="0"/>
           </a:p>
@@ -7054,14 +7051,13 @@
         </p:nvPicPr>
         <p:blipFill>
           <a:blip r:embed="rId3"/>
-          <a:stretch>
-            <a:fillRect/>
-          </a:stretch>
+          <a:srcRect/>
+          <a:stretch/>
         </p:blipFill>
         <p:spPr>
           <a:xfrm>
-            <a:off x="4664883" y="1319847"/>
-            <a:ext cx="4399202" cy="2639520"/>
+            <a:off x="4588934" y="1584000"/>
+            <a:ext cx="4399200" cy="2639520"/>
           </a:xfrm>
           <a:prstGeom prst="rect">
             <a:avLst/>
@@ -7084,13 +7080,12 @@
         </p:nvPicPr>
         <p:blipFill>
           <a:blip r:embed="rId4"/>
-          <a:stretch>
-            <a:fillRect/>
-          </a:stretch>
+          <a:srcRect/>
+          <a:stretch/>
         </p:blipFill>
         <p:spPr>
           <a:xfrm>
-            <a:off x="79915" y="1319847"/>
+            <a:off x="130465" y="1584000"/>
             <a:ext cx="4399200" cy="2639520"/>
           </a:xfrm>
           <a:prstGeom prst="rect">
@@ -7177,7 +7172,7 @@
             </a:pPr>
             <a:r>
               <a:rPr lang="it" sz="2820" dirty="0"/>
-              <a:t>Risultati Drop feature</a:t>
+              <a:t>Risultati Drop Feature</a:t>
             </a:r>
             <a:endParaRPr sz="2820" dirty="0"/>
           </a:p>
@@ -7199,14 +7194,13 @@
         </p:nvPicPr>
         <p:blipFill>
           <a:blip r:embed="rId3"/>
-          <a:stretch>
-            <a:fillRect/>
-          </a:stretch>
+          <a:srcRect/>
+          <a:stretch/>
         </p:blipFill>
         <p:spPr>
           <a:xfrm>
-            <a:off x="4622800" y="1193710"/>
-            <a:ext cx="4399944" cy="2639966"/>
+            <a:off x="4588934" y="1584000"/>
+            <a:ext cx="4399943" cy="2639966"/>
           </a:xfrm>
           <a:prstGeom prst="rect">
             <a:avLst/>
@@ -7229,14 +7223,13 @@
         </p:nvPicPr>
         <p:blipFill>
           <a:blip r:embed="rId4"/>
-          <a:stretch>
-            <a:fillRect/>
-          </a:stretch>
+          <a:srcRect/>
+          <a:stretch/>
         </p:blipFill>
         <p:spPr>
           <a:xfrm>
-            <a:off x="121257" y="1193710"/>
-            <a:ext cx="4399944" cy="2639966"/>
+            <a:off x="129722" y="1584000"/>
+            <a:ext cx="4399943" cy="2639966"/>
           </a:xfrm>
           <a:prstGeom prst="rect">
             <a:avLst/>
@@ -7322,7 +7315,7 @@
             </a:pPr>
             <a:r>
               <a:rPr lang="it" sz="2820" dirty="0"/>
-              <a:t>Risultati label flipping</a:t>
+              <a:t>Risultati Label Flipping</a:t>
             </a:r>
             <a:endParaRPr sz="2820" dirty="0"/>
           </a:p>
@@ -7344,14 +7337,13 @@
         </p:nvPicPr>
         <p:blipFill>
           <a:blip r:embed="rId3"/>
-          <a:stretch>
-            <a:fillRect/>
-          </a:stretch>
+          <a:srcRect/>
+          <a:stretch/>
         </p:blipFill>
         <p:spPr>
           <a:xfrm>
-            <a:off x="1202418" y="957929"/>
-            <a:ext cx="6739164" cy="4043498"/>
+            <a:off x="1202418" y="954000"/>
+            <a:ext cx="6739163" cy="4043498"/>
           </a:xfrm>
           <a:prstGeom prst="rect">
             <a:avLst/>
@@ -7390,36 +7382,6 @@
       </p:grpSpPr>
       <p:sp>
         <p:nvSpPr>
-          <p:cNvPr id="2" name="Titolo 1">
-            <a:extLst>
-              <a:ext uri="{FF2B5EF4-FFF2-40B4-BE49-F238E27FC236}">
-                <a16:creationId xmlns:a16="http://schemas.microsoft.com/office/drawing/2014/main" id="{881F14E4-CABE-9F6A-B626-E0453FD11A36}"/>
-              </a:ext>
-            </a:extLst>
-          </p:cNvPr>
-          <p:cNvSpPr>
-            <a:spLocks noGrp="1"/>
-          </p:cNvSpPr>
-          <p:nvPr>
-            <p:ph type="title"/>
-          </p:nvPr>
-        </p:nvSpPr>
-        <p:spPr/>
-        <p:txBody>
-          <a:bodyPr>
-            <a:normAutofit fontScale="90000"/>
-          </a:bodyPr>
-          <a:lstStyle/>
-          <a:p>
-            <a:r>
-              <a:rPr lang="it-IT" dirty="0"/>
-              <a:t>Conclusioni</a:t>
-            </a:r>
-          </a:p>
-        </p:txBody>
-      </p:sp>
-      <p:sp>
-        <p:nvSpPr>
           <p:cNvPr id="3" name="Segnaposto testo 2">
             <a:extLst>
               <a:ext uri="{FF2B5EF4-FFF2-40B4-BE49-F238E27FC236}">
@@ -7441,27 +7403,27 @@
           <a:p>
             <a:r>
               <a:rPr lang="it-IT" dirty="0"/>
-              <a:t>Random </a:t>
-            </a:r>
-            <a:r>
-              <a:rPr lang="it-IT" dirty="0" err="1"/>
-              <a:t>forest</a:t>
-            </a:r>
-            <a:r>
-              <a:rPr lang="it-IT" dirty="0"/>
-              <a:t> più resistente a interferenza</a:t>
+              <a:t>Random Forest è più resistente a interferenze</a:t>
             </a:r>
           </a:p>
           <a:p>
             <a:r>
               <a:rPr lang="it-IT" dirty="0"/>
-              <a:t>Rete neurale più prona a degradazione</a:t>
+              <a:t>La Rete Neurale (MLP) è più prona a degradazione</a:t>
             </a:r>
           </a:p>
           <a:p>
             <a:r>
               <a:rPr lang="it-IT" dirty="0"/>
-              <a:t>Label flip crea problemi ovunque</a:t>
+              <a:t>Label </a:t>
+            </a:r>
+            <a:r>
+              <a:rPr lang="it-IT" dirty="0" err="1"/>
+              <a:t>Flipping</a:t>
+            </a:r>
+            <a:r>
+              <a:rPr lang="it-IT" dirty="0"/>
+              <a:t> crea problemi ovunque</a:t>
             </a:r>
           </a:p>
           <a:p>
@@ -7477,8 +7439,57 @@
           <a:p>
             <a:r>
               <a:rPr lang="it-IT" dirty="0"/>
-              <a:t>Le top feature non sono essenziali se non nella rete</a:t>
+              <a:t>Le Top Feature non sono essenziali se non per MLP</a:t>
             </a:r>
+          </a:p>
+        </p:txBody>
+      </p:sp>
+      <p:sp>
+        <p:nvSpPr>
+          <p:cNvPr id="6" name="Google Shape;140;p23">
+            <a:extLst>
+              <a:ext uri="{FF2B5EF4-FFF2-40B4-BE49-F238E27FC236}">
+                <a16:creationId xmlns:a16="http://schemas.microsoft.com/office/drawing/2014/main" id="{0A5990F2-23C6-C0FE-0AAF-B4AC0273AECF}"/>
+              </a:ext>
+            </a:extLst>
+          </p:cNvPr>
+          <p:cNvSpPr txBox="1">
+            <a:spLocks noGrp="1"/>
+          </p:cNvSpPr>
+          <p:nvPr>
+            <p:ph type="title"/>
+          </p:nvPr>
+        </p:nvSpPr>
+        <p:spPr>
+          <a:xfrm>
+            <a:off x="311700" y="305400"/>
+            <a:ext cx="8520600" cy="572700"/>
+          </a:xfrm>
+          <a:prstGeom prst="rect">
+            <a:avLst/>
+          </a:prstGeom>
+        </p:spPr>
+        <p:txBody>
+          <a:bodyPr spcFirstLastPara="1" wrap="square" lIns="91425" tIns="91425" rIns="91425" bIns="91425" anchor="t" anchorCtr="0">
+            <a:noAutofit/>
+          </a:bodyPr>
+          <a:lstStyle/>
+          <a:p>
+            <a:pPr marL="0" lvl="0" indent="0" algn="l" rtl="0">
+              <a:spcBef>
+                <a:spcPts val="0"/>
+              </a:spcBef>
+              <a:spcAft>
+                <a:spcPts val="0"/>
+              </a:spcAft>
+              <a:buSzPts val="990"/>
+              <a:buNone/>
+            </a:pPr>
+            <a:r>
+              <a:rPr lang="it" sz="2820" dirty="0"/>
+              <a:t>Conclusioni</a:t>
+            </a:r>
+            <a:endParaRPr sz="2820" dirty="0"/>
           </a:p>
         </p:txBody>
       </p:sp>
@@ -7588,29 +7599,288 @@
       </p:grpSpPr>
       <p:sp>
         <p:nvSpPr>
-          <p:cNvPr id="2" name="Titolo 1">
+          <p:cNvPr id="10" name="Google Shape;60;p14">
             <a:extLst>
               <a:ext uri="{FF2B5EF4-FFF2-40B4-BE49-F238E27FC236}">
-                <a16:creationId xmlns:a16="http://schemas.microsoft.com/office/drawing/2014/main" id="{03B348DD-A98C-456C-BF43-CB2CECF56C64}"/>
+                <a16:creationId xmlns:a16="http://schemas.microsoft.com/office/drawing/2014/main" id="{E20E4C23-27FB-2263-B636-AF706A03E522}"/>
               </a:ext>
             </a:extLst>
           </p:cNvPr>
-          <p:cNvSpPr>
-            <a:spLocks noGrp="1"/>
+          <p:cNvSpPr txBox="1">
+            <a:spLocks/>
           </p:cNvSpPr>
-          <p:nvPr>
-            <p:ph type="title"/>
-          </p:nvPr>
+          <p:nvPr/>
         </p:nvSpPr>
-        <p:spPr/>
+        <p:spPr>
+          <a:xfrm>
+            <a:off x="311700" y="307050"/>
+            <a:ext cx="8520600" cy="572700"/>
+          </a:xfrm>
+          <a:prstGeom prst="rect">
+            <a:avLst/>
+          </a:prstGeom>
+          <a:noFill/>
+          <a:ln>
+            <a:noFill/>
+          </a:ln>
+        </p:spPr>
         <p:txBody>
-          <a:bodyPr>
-            <a:normAutofit fontScale="90000"/>
+          <a:bodyPr spcFirstLastPara="1" wrap="square" lIns="91425" tIns="91425" rIns="91425" bIns="91425" anchor="t" anchorCtr="0">
+            <a:noAutofit/>
           </a:bodyPr>
-          <a:lstStyle/>
+          <a:lstStyle>
+            <a:defPPr marR="0" lvl="0" algn="l" rtl="0">
+              <a:lnSpc>
+                <a:spcPct val="100000"/>
+              </a:lnSpc>
+              <a:spcBef>
+                <a:spcPts val="0"/>
+              </a:spcBef>
+              <a:spcAft>
+                <a:spcPts val="0"/>
+              </a:spcAft>
+            </a:defPPr>
+            <a:lvl1pPr marR="0" lvl="0" algn="l" rtl="0">
+              <a:lnSpc>
+                <a:spcPct val="100000"/>
+              </a:lnSpc>
+              <a:spcBef>
+                <a:spcPts val="0"/>
+              </a:spcBef>
+              <a:spcAft>
+                <a:spcPts val="0"/>
+              </a:spcAft>
+              <a:buClr>
+                <a:schemeClr val="dk1"/>
+              </a:buClr>
+              <a:buSzPts val="2800"/>
+              <a:buFont typeface="Arial"/>
+              <a:buNone/>
+              <a:defRPr sz="2800" b="0" i="0" u="none" strike="noStrike" cap="none">
+                <a:solidFill>
+                  <a:schemeClr val="dk1"/>
+                </a:solidFill>
+                <a:latin typeface="Arial"/>
+                <a:ea typeface="Arial"/>
+                <a:cs typeface="Arial"/>
+                <a:sym typeface="Arial"/>
+              </a:defRPr>
+            </a:lvl1pPr>
+            <a:lvl2pPr marR="0" lvl="1" algn="l" rtl="0">
+              <a:lnSpc>
+                <a:spcPct val="100000"/>
+              </a:lnSpc>
+              <a:spcBef>
+                <a:spcPts val="0"/>
+              </a:spcBef>
+              <a:spcAft>
+                <a:spcPts val="0"/>
+              </a:spcAft>
+              <a:buClr>
+                <a:schemeClr val="dk1"/>
+              </a:buClr>
+              <a:buSzPts val="2800"/>
+              <a:buFont typeface="Arial"/>
+              <a:buNone/>
+              <a:defRPr sz="2800" b="0" i="0" u="none" strike="noStrike" cap="none">
+                <a:solidFill>
+                  <a:schemeClr val="dk1"/>
+                </a:solidFill>
+                <a:latin typeface="Arial"/>
+                <a:ea typeface="Arial"/>
+                <a:cs typeface="Arial"/>
+                <a:sym typeface="Arial"/>
+              </a:defRPr>
+            </a:lvl2pPr>
+            <a:lvl3pPr marR="0" lvl="2" algn="l" rtl="0">
+              <a:lnSpc>
+                <a:spcPct val="100000"/>
+              </a:lnSpc>
+              <a:spcBef>
+                <a:spcPts val="0"/>
+              </a:spcBef>
+              <a:spcAft>
+                <a:spcPts val="0"/>
+              </a:spcAft>
+              <a:buClr>
+                <a:schemeClr val="dk1"/>
+              </a:buClr>
+              <a:buSzPts val="2800"/>
+              <a:buFont typeface="Arial"/>
+              <a:buNone/>
+              <a:defRPr sz="2800" b="0" i="0" u="none" strike="noStrike" cap="none">
+                <a:solidFill>
+                  <a:schemeClr val="dk1"/>
+                </a:solidFill>
+                <a:latin typeface="Arial"/>
+                <a:ea typeface="Arial"/>
+                <a:cs typeface="Arial"/>
+                <a:sym typeface="Arial"/>
+              </a:defRPr>
+            </a:lvl3pPr>
+            <a:lvl4pPr marR="0" lvl="3" algn="l" rtl="0">
+              <a:lnSpc>
+                <a:spcPct val="100000"/>
+              </a:lnSpc>
+              <a:spcBef>
+                <a:spcPts val="0"/>
+              </a:spcBef>
+              <a:spcAft>
+                <a:spcPts val="0"/>
+              </a:spcAft>
+              <a:buClr>
+                <a:schemeClr val="dk1"/>
+              </a:buClr>
+              <a:buSzPts val="2800"/>
+              <a:buFont typeface="Arial"/>
+              <a:buNone/>
+              <a:defRPr sz="2800" b="0" i="0" u="none" strike="noStrike" cap="none">
+                <a:solidFill>
+                  <a:schemeClr val="dk1"/>
+                </a:solidFill>
+                <a:latin typeface="Arial"/>
+                <a:ea typeface="Arial"/>
+                <a:cs typeface="Arial"/>
+                <a:sym typeface="Arial"/>
+              </a:defRPr>
+            </a:lvl4pPr>
+            <a:lvl5pPr marR="0" lvl="4" algn="l" rtl="0">
+              <a:lnSpc>
+                <a:spcPct val="100000"/>
+              </a:lnSpc>
+              <a:spcBef>
+                <a:spcPts val="0"/>
+              </a:spcBef>
+              <a:spcAft>
+                <a:spcPts val="0"/>
+              </a:spcAft>
+              <a:buClr>
+                <a:schemeClr val="dk1"/>
+              </a:buClr>
+              <a:buSzPts val="2800"/>
+              <a:buFont typeface="Arial"/>
+              <a:buNone/>
+              <a:defRPr sz="2800" b="0" i="0" u="none" strike="noStrike" cap="none">
+                <a:solidFill>
+                  <a:schemeClr val="dk1"/>
+                </a:solidFill>
+                <a:latin typeface="Arial"/>
+                <a:ea typeface="Arial"/>
+                <a:cs typeface="Arial"/>
+                <a:sym typeface="Arial"/>
+              </a:defRPr>
+            </a:lvl5pPr>
+            <a:lvl6pPr marR="0" lvl="5" algn="l" rtl="0">
+              <a:lnSpc>
+                <a:spcPct val="100000"/>
+              </a:lnSpc>
+              <a:spcBef>
+                <a:spcPts val="0"/>
+              </a:spcBef>
+              <a:spcAft>
+                <a:spcPts val="0"/>
+              </a:spcAft>
+              <a:buClr>
+                <a:schemeClr val="dk1"/>
+              </a:buClr>
+              <a:buSzPts val="2800"/>
+              <a:buFont typeface="Arial"/>
+              <a:buNone/>
+              <a:defRPr sz="2800" b="0" i="0" u="none" strike="noStrike" cap="none">
+                <a:solidFill>
+                  <a:schemeClr val="dk1"/>
+                </a:solidFill>
+                <a:latin typeface="Arial"/>
+                <a:ea typeface="Arial"/>
+                <a:cs typeface="Arial"/>
+                <a:sym typeface="Arial"/>
+              </a:defRPr>
+            </a:lvl6pPr>
+            <a:lvl7pPr marR="0" lvl="6" algn="l" rtl="0">
+              <a:lnSpc>
+                <a:spcPct val="100000"/>
+              </a:lnSpc>
+              <a:spcBef>
+                <a:spcPts val="0"/>
+              </a:spcBef>
+              <a:spcAft>
+                <a:spcPts val="0"/>
+              </a:spcAft>
+              <a:buClr>
+                <a:schemeClr val="dk1"/>
+              </a:buClr>
+              <a:buSzPts val="2800"/>
+              <a:buFont typeface="Arial"/>
+              <a:buNone/>
+              <a:defRPr sz="2800" b="0" i="0" u="none" strike="noStrike" cap="none">
+                <a:solidFill>
+                  <a:schemeClr val="dk1"/>
+                </a:solidFill>
+                <a:latin typeface="Arial"/>
+                <a:ea typeface="Arial"/>
+                <a:cs typeface="Arial"/>
+                <a:sym typeface="Arial"/>
+              </a:defRPr>
+            </a:lvl7pPr>
+            <a:lvl8pPr marR="0" lvl="7" algn="l" rtl="0">
+              <a:lnSpc>
+                <a:spcPct val="100000"/>
+              </a:lnSpc>
+              <a:spcBef>
+                <a:spcPts val="0"/>
+              </a:spcBef>
+              <a:spcAft>
+                <a:spcPts val="0"/>
+              </a:spcAft>
+              <a:buClr>
+                <a:schemeClr val="dk1"/>
+              </a:buClr>
+              <a:buSzPts val="2800"/>
+              <a:buFont typeface="Arial"/>
+              <a:buNone/>
+              <a:defRPr sz="2800" b="0" i="0" u="none" strike="noStrike" cap="none">
+                <a:solidFill>
+                  <a:schemeClr val="dk1"/>
+                </a:solidFill>
+                <a:latin typeface="Arial"/>
+                <a:ea typeface="Arial"/>
+                <a:cs typeface="Arial"/>
+                <a:sym typeface="Arial"/>
+              </a:defRPr>
+            </a:lvl8pPr>
+            <a:lvl9pPr marR="0" lvl="8" algn="l" rtl="0">
+              <a:lnSpc>
+                <a:spcPct val="100000"/>
+              </a:lnSpc>
+              <a:spcBef>
+                <a:spcPts val="0"/>
+              </a:spcBef>
+              <a:spcAft>
+                <a:spcPts val="0"/>
+              </a:spcAft>
+              <a:buClr>
+                <a:schemeClr val="dk1"/>
+              </a:buClr>
+              <a:buSzPts val="2800"/>
+              <a:buFont typeface="Arial"/>
+              <a:buNone/>
+              <a:defRPr sz="2800" b="0" i="0" u="none" strike="noStrike" cap="none">
+                <a:solidFill>
+                  <a:schemeClr val="dk1"/>
+                </a:solidFill>
+                <a:latin typeface="Arial"/>
+                <a:ea typeface="Arial"/>
+                <a:cs typeface="Arial"/>
+                <a:sym typeface="Arial"/>
+              </a:defRPr>
+            </a:lvl9pPr>
+          </a:lstStyle>
           <a:p>
+            <a:pPr>
+              <a:buSzPts val="990"/>
+            </a:pPr>
             <a:r>
-              <a:rPr lang="it-IT" dirty="0"/>
+              <a:rPr lang="it-IT" sz="2820" dirty="0"/>
               <a:t>Obiettivo</a:t>
             </a:r>
           </a:p>
@@ -7618,26 +7888,285 @@
       </p:sp>
       <p:sp>
         <p:nvSpPr>
-          <p:cNvPr id="3" name="Segnaposto testo 2">
+          <p:cNvPr id="11" name="Google Shape;117;p20">
             <a:extLst>
               <a:ext uri="{FF2B5EF4-FFF2-40B4-BE49-F238E27FC236}">
-                <a16:creationId xmlns:a16="http://schemas.microsoft.com/office/drawing/2014/main" id="{08EB63E4-5121-3049-1F9A-E555FDE7D9E2}"/>
+                <a16:creationId xmlns:a16="http://schemas.microsoft.com/office/drawing/2014/main" id="{26F014C4-12BB-CA3C-E48A-DF101E8290EC}"/>
               </a:ext>
             </a:extLst>
           </p:cNvPr>
-          <p:cNvSpPr>
-            <a:spLocks noGrp="1"/>
+          <p:cNvSpPr txBox="1">
+            <a:spLocks/>
           </p:cNvSpPr>
-          <p:nvPr>
-            <p:ph type="body" idx="1"/>
-          </p:nvPr>
+          <p:nvPr/>
         </p:nvSpPr>
-        <p:spPr/>
+        <p:spPr>
+          <a:xfrm>
+            <a:off x="311700" y="988105"/>
+            <a:ext cx="8472900" cy="2884500"/>
+          </a:xfrm>
+          <a:prstGeom prst="rect">
+            <a:avLst/>
+          </a:prstGeom>
+          <a:noFill/>
+          <a:ln>
+            <a:noFill/>
+          </a:ln>
+        </p:spPr>
         <p:txBody>
-          <a:bodyPr/>
-          <a:lstStyle/>
+          <a:bodyPr spcFirstLastPara="1" wrap="square" lIns="91425" tIns="91425" rIns="91425" bIns="91425" anchor="t" anchorCtr="0">
+            <a:normAutofit/>
+          </a:bodyPr>
+          <a:lstStyle>
+            <a:defPPr marR="0" lvl="0" algn="l" rtl="0">
+              <a:lnSpc>
+                <a:spcPct val="100000"/>
+              </a:lnSpc>
+              <a:spcBef>
+                <a:spcPts val="0"/>
+              </a:spcBef>
+              <a:spcAft>
+                <a:spcPts val="0"/>
+              </a:spcAft>
+            </a:defPPr>
+            <a:lvl1pPr marL="457200" marR="0" lvl="0" indent="-342900" algn="l" rtl="0">
+              <a:lnSpc>
+                <a:spcPct val="115000"/>
+              </a:lnSpc>
+              <a:spcBef>
+                <a:spcPts val="0"/>
+              </a:spcBef>
+              <a:spcAft>
+                <a:spcPts val="0"/>
+              </a:spcAft>
+              <a:buClr>
+                <a:schemeClr val="lt2"/>
+              </a:buClr>
+              <a:buSzPts val="1800"/>
+              <a:buFont typeface="Arial"/>
+              <a:buChar char="●"/>
+              <a:defRPr sz="1800" b="0" i="0" u="none" strike="noStrike" cap="none">
+                <a:solidFill>
+                  <a:schemeClr val="lt2"/>
+                </a:solidFill>
+                <a:latin typeface="Arial"/>
+                <a:ea typeface="Arial"/>
+                <a:cs typeface="Arial"/>
+                <a:sym typeface="Arial"/>
+              </a:defRPr>
+            </a:lvl1pPr>
+            <a:lvl2pPr marL="914400" marR="0" lvl="1" indent="-317500" algn="l" rtl="0">
+              <a:lnSpc>
+                <a:spcPct val="115000"/>
+              </a:lnSpc>
+              <a:spcBef>
+                <a:spcPts val="0"/>
+              </a:spcBef>
+              <a:spcAft>
+                <a:spcPts val="0"/>
+              </a:spcAft>
+              <a:buClr>
+                <a:schemeClr val="lt2"/>
+              </a:buClr>
+              <a:buSzPts val="1400"/>
+              <a:buFont typeface="Arial"/>
+              <a:buChar char="○"/>
+              <a:defRPr sz="1400" b="0" i="0" u="none" strike="noStrike" cap="none">
+                <a:solidFill>
+                  <a:schemeClr val="lt2"/>
+                </a:solidFill>
+                <a:latin typeface="Arial"/>
+                <a:ea typeface="Arial"/>
+                <a:cs typeface="Arial"/>
+                <a:sym typeface="Arial"/>
+              </a:defRPr>
+            </a:lvl2pPr>
+            <a:lvl3pPr marL="1371600" marR="0" lvl="2" indent="-317500" algn="l" rtl="0">
+              <a:lnSpc>
+                <a:spcPct val="115000"/>
+              </a:lnSpc>
+              <a:spcBef>
+                <a:spcPts val="0"/>
+              </a:spcBef>
+              <a:spcAft>
+                <a:spcPts val="0"/>
+              </a:spcAft>
+              <a:buClr>
+                <a:schemeClr val="lt2"/>
+              </a:buClr>
+              <a:buSzPts val="1400"/>
+              <a:buFont typeface="Arial"/>
+              <a:buChar char="■"/>
+              <a:defRPr sz="1400" b="0" i="0" u="none" strike="noStrike" cap="none">
+                <a:solidFill>
+                  <a:schemeClr val="lt2"/>
+                </a:solidFill>
+                <a:latin typeface="Arial"/>
+                <a:ea typeface="Arial"/>
+                <a:cs typeface="Arial"/>
+                <a:sym typeface="Arial"/>
+              </a:defRPr>
+            </a:lvl3pPr>
+            <a:lvl4pPr marL="1828800" marR="0" lvl="3" indent="-317500" algn="l" rtl="0">
+              <a:lnSpc>
+                <a:spcPct val="115000"/>
+              </a:lnSpc>
+              <a:spcBef>
+                <a:spcPts val="0"/>
+              </a:spcBef>
+              <a:spcAft>
+                <a:spcPts val="0"/>
+              </a:spcAft>
+              <a:buClr>
+                <a:schemeClr val="lt2"/>
+              </a:buClr>
+              <a:buSzPts val="1400"/>
+              <a:buFont typeface="Arial"/>
+              <a:buChar char="●"/>
+              <a:defRPr sz="1400" b="0" i="0" u="none" strike="noStrike" cap="none">
+                <a:solidFill>
+                  <a:schemeClr val="lt2"/>
+                </a:solidFill>
+                <a:latin typeface="Arial"/>
+                <a:ea typeface="Arial"/>
+                <a:cs typeface="Arial"/>
+                <a:sym typeface="Arial"/>
+              </a:defRPr>
+            </a:lvl4pPr>
+            <a:lvl5pPr marL="2286000" marR="0" lvl="4" indent="-317500" algn="l" rtl="0">
+              <a:lnSpc>
+                <a:spcPct val="115000"/>
+              </a:lnSpc>
+              <a:spcBef>
+                <a:spcPts val="0"/>
+              </a:spcBef>
+              <a:spcAft>
+                <a:spcPts val="0"/>
+              </a:spcAft>
+              <a:buClr>
+                <a:schemeClr val="lt2"/>
+              </a:buClr>
+              <a:buSzPts val="1400"/>
+              <a:buFont typeface="Arial"/>
+              <a:buChar char="○"/>
+              <a:defRPr sz="1400" b="0" i="0" u="none" strike="noStrike" cap="none">
+                <a:solidFill>
+                  <a:schemeClr val="lt2"/>
+                </a:solidFill>
+                <a:latin typeface="Arial"/>
+                <a:ea typeface="Arial"/>
+                <a:cs typeface="Arial"/>
+                <a:sym typeface="Arial"/>
+              </a:defRPr>
+            </a:lvl5pPr>
+            <a:lvl6pPr marL="2743200" marR="0" lvl="5" indent="-317500" algn="l" rtl="0">
+              <a:lnSpc>
+                <a:spcPct val="115000"/>
+              </a:lnSpc>
+              <a:spcBef>
+                <a:spcPts val="0"/>
+              </a:spcBef>
+              <a:spcAft>
+                <a:spcPts val="0"/>
+              </a:spcAft>
+              <a:buClr>
+                <a:schemeClr val="lt2"/>
+              </a:buClr>
+              <a:buSzPts val="1400"/>
+              <a:buFont typeface="Arial"/>
+              <a:buChar char="■"/>
+              <a:defRPr sz="1400" b="0" i="0" u="none" strike="noStrike" cap="none">
+                <a:solidFill>
+                  <a:schemeClr val="lt2"/>
+                </a:solidFill>
+                <a:latin typeface="Arial"/>
+                <a:ea typeface="Arial"/>
+                <a:cs typeface="Arial"/>
+                <a:sym typeface="Arial"/>
+              </a:defRPr>
+            </a:lvl6pPr>
+            <a:lvl7pPr marL="3200400" marR="0" lvl="6" indent="-317500" algn="l" rtl="0">
+              <a:lnSpc>
+                <a:spcPct val="115000"/>
+              </a:lnSpc>
+              <a:spcBef>
+                <a:spcPts val="0"/>
+              </a:spcBef>
+              <a:spcAft>
+                <a:spcPts val="0"/>
+              </a:spcAft>
+              <a:buClr>
+                <a:schemeClr val="lt2"/>
+              </a:buClr>
+              <a:buSzPts val="1400"/>
+              <a:buFont typeface="Arial"/>
+              <a:buChar char="●"/>
+              <a:defRPr sz="1400" b="0" i="0" u="none" strike="noStrike" cap="none">
+                <a:solidFill>
+                  <a:schemeClr val="lt2"/>
+                </a:solidFill>
+                <a:latin typeface="Arial"/>
+                <a:ea typeface="Arial"/>
+                <a:cs typeface="Arial"/>
+                <a:sym typeface="Arial"/>
+              </a:defRPr>
+            </a:lvl7pPr>
+            <a:lvl8pPr marL="3657600" marR="0" lvl="7" indent="-317500" algn="l" rtl="0">
+              <a:lnSpc>
+                <a:spcPct val="115000"/>
+              </a:lnSpc>
+              <a:spcBef>
+                <a:spcPts val="0"/>
+              </a:spcBef>
+              <a:spcAft>
+                <a:spcPts val="0"/>
+              </a:spcAft>
+              <a:buClr>
+                <a:schemeClr val="lt2"/>
+              </a:buClr>
+              <a:buSzPts val="1400"/>
+              <a:buFont typeface="Arial"/>
+              <a:buChar char="○"/>
+              <a:defRPr sz="1400" b="0" i="0" u="none" strike="noStrike" cap="none">
+                <a:solidFill>
+                  <a:schemeClr val="lt2"/>
+                </a:solidFill>
+                <a:latin typeface="Arial"/>
+                <a:ea typeface="Arial"/>
+                <a:cs typeface="Arial"/>
+                <a:sym typeface="Arial"/>
+              </a:defRPr>
+            </a:lvl8pPr>
+            <a:lvl9pPr marL="4114800" marR="0" lvl="8" indent="-317500" algn="l" rtl="0">
+              <a:lnSpc>
+                <a:spcPct val="115000"/>
+              </a:lnSpc>
+              <a:spcBef>
+                <a:spcPts val="0"/>
+              </a:spcBef>
+              <a:spcAft>
+                <a:spcPts val="0"/>
+              </a:spcAft>
+              <a:buClr>
+                <a:schemeClr val="lt2"/>
+              </a:buClr>
+              <a:buSzPts val="1400"/>
+              <a:buFont typeface="Arial"/>
+              <a:buChar char="■"/>
+              <a:defRPr sz="1400" b="0" i="0" u="none" strike="noStrike" cap="none">
+                <a:solidFill>
+                  <a:schemeClr val="lt2"/>
+                </a:solidFill>
+                <a:latin typeface="Arial"/>
+                <a:ea typeface="Arial"/>
+                <a:cs typeface="Arial"/>
+                <a:sym typeface="Arial"/>
+              </a:defRPr>
+            </a:lvl9pPr>
+          </a:lstStyle>
           <a:p>
-            <a:pPr marL="114300" indent="0">
+            <a:pPr marL="0" indent="0">
+              <a:buFont typeface="Arial"/>
               <a:buNone/>
             </a:pPr>
             <a:r>
@@ -7652,7 +8181,7 @@
             </a:pPr>
             <a:r>
               <a:rPr lang="it-IT" dirty="0"/>
-              <a:t>Analizzare il dataset per la diagnosi del carcinoma mammario Wisconsin </a:t>
+              <a:t>Analizzare il Dataset per la diagnosi del carcinoma mammario Wisconsin </a:t>
             </a:r>
             <a:r>
               <a:rPr lang="it-IT" dirty="0" err="1"/>
@@ -7660,7 +8189,7 @@
             </a:r>
             <a:r>
               <a:rPr lang="it-IT" dirty="0"/>
-              <a:t> Cancer Dataset.</a:t>
+              <a:t> Cancer Dataset;</a:t>
             </a:r>
           </a:p>
           <a:p>
@@ -7670,15 +8199,15 @@
             </a:pPr>
             <a:r>
               <a:rPr lang="it-IT" dirty="0"/>
-              <a:t>introdurre del data </a:t>
+              <a:t>Introdurre del Data </a:t>
             </a:r>
             <a:r>
               <a:rPr lang="it-IT" dirty="0" err="1"/>
-              <a:t>poisoning</a:t>
+              <a:t>Poisoning</a:t>
             </a:r>
             <a:r>
               <a:rPr lang="it-IT" dirty="0"/>
-              <a:t> all’interno del dataset</a:t>
+              <a:t> all’interno del Dataset;</a:t>
             </a:r>
           </a:p>
           <a:p>
@@ -7688,7 +8217,7 @@
             </a:pPr>
             <a:r>
               <a:rPr lang="it-IT" dirty="0"/>
-              <a:t>Addestrare 3 modelli</a:t>
+              <a:t>Addestrare 3 modelli differenti con vari livelli di corruzione del Dataset;</a:t>
             </a:r>
           </a:p>
           <a:p>
@@ -7698,12 +8227,21 @@
             </a:pPr>
             <a:r>
               <a:rPr lang="it-IT" dirty="0"/>
-              <a:t>Osservare </a:t>
+              <a:t>Osservare come i modelli si comportano al variare della corruzione.</a:t>
             </a:r>
-            <a:r>
-              <a:rPr lang="it-IT" sz="1700" dirty="0"/>
-              <a:t>come i modelli si comportano al variare del rumore nel dataset</a:t>
-            </a:r>
+          </a:p>
+          <a:p>
+            <a:pPr marL="114300" indent="0">
+              <a:buNone/>
+            </a:pPr>
+            <a:endParaRPr lang="it-IT" dirty="0"/>
+          </a:p>
+          <a:p>
+            <a:pPr marL="0" indent="0">
+              <a:buFont typeface="Arial"/>
+              <a:buNone/>
+            </a:pPr>
+            <a:endParaRPr lang="it-IT" dirty="0"/>
           </a:p>
         </p:txBody>
       </p:sp>
@@ -7773,10 +8311,10 @@
               <a:buNone/>
             </a:pPr>
             <a:r>
-              <a:rPr lang="it" sz="2820"/>
+              <a:rPr lang="it" sz="2820" dirty="0"/>
               <a:t>Informazioni sul dataset</a:t>
             </a:r>
-            <a:endParaRPr sz="2820"/>
+            <a:endParaRPr sz="2820" dirty="0"/>
           </a:p>
         </p:txBody>
       </p:sp>
@@ -7792,7 +8330,7 @@
         </p:nvSpPr>
         <p:spPr>
           <a:xfrm>
-            <a:off x="311700" y="1095000"/>
+            <a:off x="311700" y="986400"/>
             <a:ext cx="5228700" cy="1261500"/>
           </a:xfrm>
           <a:prstGeom prst="rect">
@@ -7801,7 +8339,7 @@
         </p:spPr>
         <p:txBody>
           <a:bodyPr spcFirstLastPara="1" wrap="square" lIns="91425" tIns="91425" rIns="91425" bIns="91425" anchor="t" anchorCtr="0">
-            <a:normAutofit fontScale="92500"/>
+            <a:noAutofit/>
           </a:bodyPr>
           <a:lstStyle/>
           <a:p>
@@ -7838,7 +8376,7 @@
         </p:blipFill>
         <p:spPr>
           <a:xfrm>
-            <a:off x="1416000" y="2479750"/>
+            <a:off x="1416000" y="2513618"/>
             <a:ext cx="2606149" cy="2348975"/>
           </a:xfrm>
           <a:prstGeom prst="rect">
@@ -7983,10 +8521,10 @@
               <a:buNone/>
             </a:pPr>
             <a:r>
-              <a:rPr lang="it" sz="2820"/>
+              <a:rPr lang="it" sz="2820" dirty="0"/>
               <a:t>Data engineering</a:t>
             </a:r>
-            <a:endParaRPr sz="2820"/>
+            <a:endParaRPr sz="2820" dirty="0"/>
           </a:p>
         </p:txBody>
       </p:sp>
@@ -8003,7 +8541,7 @@
         <p:spPr>
           <a:xfrm>
             <a:off x="313200" y="987750"/>
-            <a:ext cx="5471700" cy="1584000"/>
+            <a:ext cx="5291733" cy="1584000"/>
           </a:xfrm>
           <a:prstGeom prst="rect">
             <a:avLst/>
@@ -8011,7 +8549,7 @@
         </p:spPr>
         <p:txBody>
           <a:bodyPr spcFirstLastPara="1" wrap="square" lIns="91425" tIns="91425" rIns="91425" bIns="91425" anchor="t" anchorCtr="0">
-            <a:normAutofit/>
+            <a:noAutofit/>
           </a:bodyPr>
           <a:lstStyle/>
           <a:p>
@@ -8026,7 +8564,7 @@
             </a:pPr>
             <a:r>
               <a:rPr lang="it" dirty="0"/>
-              <a:t>La colonna “id”  rimossa data l’unicità dei valori.</a:t>
+              <a:t>La colonna “id” è stata rimossa data l’unicità dei valori.</a:t>
             </a:r>
             <a:endParaRPr dirty="0"/>
           </a:p>
@@ -8042,7 +8580,7 @@
             </a:pPr>
             <a:r>
               <a:rPr lang="it" dirty="0"/>
-              <a:t>La colonna “diagnosis” è stata trasformata in numerica.</a:t>
+              <a:t>La colonna “diagnosis” è stata trasformata in numerica (1 = maligno, 0 = benigno).</a:t>
             </a:r>
             <a:endParaRPr dirty="0"/>
           </a:p>
@@ -8218,36 +8756,6 @@
           <a:chExt cx="0" cy="0"/>
         </a:xfrm>
       </p:grpSpPr>
-      <p:sp>
-        <p:nvSpPr>
-          <p:cNvPr id="2" name="Titolo 1">
-            <a:extLst>
-              <a:ext uri="{FF2B5EF4-FFF2-40B4-BE49-F238E27FC236}">
-                <a16:creationId xmlns:a16="http://schemas.microsoft.com/office/drawing/2014/main" id="{9ED76311-8E48-DECC-46C3-50F2FAD0C7C2}"/>
-              </a:ext>
-            </a:extLst>
-          </p:cNvPr>
-          <p:cNvSpPr>
-            <a:spLocks noGrp="1"/>
-          </p:cNvSpPr>
-          <p:nvPr>
-            <p:ph type="title"/>
-          </p:nvPr>
-        </p:nvSpPr>
-        <p:spPr/>
-        <p:txBody>
-          <a:bodyPr>
-            <a:normAutofit fontScale="90000"/>
-          </a:bodyPr>
-          <a:lstStyle/>
-          <a:p>
-            <a:r>
-              <a:rPr lang="it-IT" dirty="0"/>
-              <a:t>Importanza Feature</a:t>
-            </a:r>
-          </a:p>
-        </p:txBody>
-      </p:sp>
       <p:pic>
         <p:nvPicPr>
           <p:cNvPr id="5" name="Immagine 4">
@@ -8278,6 +8786,295 @@
           </a:prstGeom>
         </p:spPr>
       </p:pic>
+      <p:sp>
+        <p:nvSpPr>
+          <p:cNvPr id="3" name="Google Shape;74;p16">
+            <a:extLst>
+              <a:ext uri="{FF2B5EF4-FFF2-40B4-BE49-F238E27FC236}">
+                <a16:creationId xmlns:a16="http://schemas.microsoft.com/office/drawing/2014/main" id="{2B61415C-299F-B62D-92F2-46A2BE016245}"/>
+              </a:ext>
+            </a:extLst>
+          </p:cNvPr>
+          <p:cNvSpPr txBox="1">
+            <a:spLocks/>
+          </p:cNvSpPr>
+          <p:nvPr/>
+        </p:nvSpPr>
+        <p:spPr>
+          <a:xfrm>
+            <a:off x="311700" y="305400"/>
+            <a:ext cx="8520600" cy="572700"/>
+          </a:xfrm>
+          <a:prstGeom prst="rect">
+            <a:avLst/>
+          </a:prstGeom>
+          <a:noFill/>
+          <a:ln>
+            <a:noFill/>
+          </a:ln>
+        </p:spPr>
+        <p:txBody>
+          <a:bodyPr spcFirstLastPara="1" wrap="square" lIns="91425" tIns="91425" rIns="91425" bIns="91425" anchor="t" anchorCtr="0">
+            <a:noAutofit/>
+          </a:bodyPr>
+          <a:lstStyle>
+            <a:defPPr marR="0" lvl="0" algn="l" rtl="0">
+              <a:lnSpc>
+                <a:spcPct val="100000"/>
+              </a:lnSpc>
+              <a:spcBef>
+                <a:spcPts val="0"/>
+              </a:spcBef>
+              <a:spcAft>
+                <a:spcPts val="0"/>
+              </a:spcAft>
+            </a:defPPr>
+            <a:lvl1pPr marR="0" lvl="0" algn="l" rtl="0">
+              <a:lnSpc>
+                <a:spcPct val="100000"/>
+              </a:lnSpc>
+              <a:spcBef>
+                <a:spcPts val="0"/>
+              </a:spcBef>
+              <a:spcAft>
+                <a:spcPts val="0"/>
+              </a:spcAft>
+              <a:buClr>
+                <a:schemeClr val="dk1"/>
+              </a:buClr>
+              <a:buSzPts val="2800"/>
+              <a:buFont typeface="Arial"/>
+              <a:buNone/>
+              <a:defRPr sz="2800" b="0" i="0" u="none" strike="noStrike" cap="none">
+                <a:solidFill>
+                  <a:schemeClr val="dk1"/>
+                </a:solidFill>
+                <a:latin typeface="Arial"/>
+                <a:ea typeface="Arial"/>
+                <a:cs typeface="Arial"/>
+                <a:sym typeface="Arial"/>
+              </a:defRPr>
+            </a:lvl1pPr>
+            <a:lvl2pPr marR="0" lvl="1" algn="l" rtl="0">
+              <a:lnSpc>
+                <a:spcPct val="100000"/>
+              </a:lnSpc>
+              <a:spcBef>
+                <a:spcPts val="0"/>
+              </a:spcBef>
+              <a:spcAft>
+                <a:spcPts val="0"/>
+              </a:spcAft>
+              <a:buClr>
+                <a:schemeClr val="dk1"/>
+              </a:buClr>
+              <a:buSzPts val="2800"/>
+              <a:buFont typeface="Arial"/>
+              <a:buNone/>
+              <a:defRPr sz="2800" b="0" i="0" u="none" strike="noStrike" cap="none">
+                <a:solidFill>
+                  <a:schemeClr val="dk1"/>
+                </a:solidFill>
+                <a:latin typeface="Arial"/>
+                <a:ea typeface="Arial"/>
+                <a:cs typeface="Arial"/>
+                <a:sym typeface="Arial"/>
+              </a:defRPr>
+            </a:lvl2pPr>
+            <a:lvl3pPr marR="0" lvl="2" algn="l" rtl="0">
+              <a:lnSpc>
+                <a:spcPct val="100000"/>
+              </a:lnSpc>
+              <a:spcBef>
+                <a:spcPts val="0"/>
+              </a:spcBef>
+              <a:spcAft>
+                <a:spcPts val="0"/>
+              </a:spcAft>
+              <a:buClr>
+                <a:schemeClr val="dk1"/>
+              </a:buClr>
+              <a:buSzPts val="2800"/>
+              <a:buFont typeface="Arial"/>
+              <a:buNone/>
+              <a:defRPr sz="2800" b="0" i="0" u="none" strike="noStrike" cap="none">
+                <a:solidFill>
+                  <a:schemeClr val="dk1"/>
+                </a:solidFill>
+                <a:latin typeface="Arial"/>
+                <a:ea typeface="Arial"/>
+                <a:cs typeface="Arial"/>
+                <a:sym typeface="Arial"/>
+              </a:defRPr>
+            </a:lvl3pPr>
+            <a:lvl4pPr marR="0" lvl="3" algn="l" rtl="0">
+              <a:lnSpc>
+                <a:spcPct val="100000"/>
+              </a:lnSpc>
+              <a:spcBef>
+                <a:spcPts val="0"/>
+              </a:spcBef>
+              <a:spcAft>
+                <a:spcPts val="0"/>
+              </a:spcAft>
+              <a:buClr>
+                <a:schemeClr val="dk1"/>
+              </a:buClr>
+              <a:buSzPts val="2800"/>
+              <a:buFont typeface="Arial"/>
+              <a:buNone/>
+              <a:defRPr sz="2800" b="0" i="0" u="none" strike="noStrike" cap="none">
+                <a:solidFill>
+                  <a:schemeClr val="dk1"/>
+                </a:solidFill>
+                <a:latin typeface="Arial"/>
+                <a:ea typeface="Arial"/>
+                <a:cs typeface="Arial"/>
+                <a:sym typeface="Arial"/>
+              </a:defRPr>
+            </a:lvl4pPr>
+            <a:lvl5pPr marR="0" lvl="4" algn="l" rtl="0">
+              <a:lnSpc>
+                <a:spcPct val="100000"/>
+              </a:lnSpc>
+              <a:spcBef>
+                <a:spcPts val="0"/>
+              </a:spcBef>
+              <a:spcAft>
+                <a:spcPts val="0"/>
+              </a:spcAft>
+              <a:buClr>
+                <a:schemeClr val="dk1"/>
+              </a:buClr>
+              <a:buSzPts val="2800"/>
+              <a:buFont typeface="Arial"/>
+              <a:buNone/>
+              <a:defRPr sz="2800" b="0" i="0" u="none" strike="noStrike" cap="none">
+                <a:solidFill>
+                  <a:schemeClr val="dk1"/>
+                </a:solidFill>
+                <a:latin typeface="Arial"/>
+                <a:ea typeface="Arial"/>
+                <a:cs typeface="Arial"/>
+                <a:sym typeface="Arial"/>
+              </a:defRPr>
+            </a:lvl5pPr>
+            <a:lvl6pPr marR="0" lvl="5" algn="l" rtl="0">
+              <a:lnSpc>
+                <a:spcPct val="100000"/>
+              </a:lnSpc>
+              <a:spcBef>
+                <a:spcPts val="0"/>
+              </a:spcBef>
+              <a:spcAft>
+                <a:spcPts val="0"/>
+              </a:spcAft>
+              <a:buClr>
+                <a:schemeClr val="dk1"/>
+              </a:buClr>
+              <a:buSzPts val="2800"/>
+              <a:buFont typeface="Arial"/>
+              <a:buNone/>
+              <a:defRPr sz="2800" b="0" i="0" u="none" strike="noStrike" cap="none">
+                <a:solidFill>
+                  <a:schemeClr val="dk1"/>
+                </a:solidFill>
+                <a:latin typeface="Arial"/>
+                <a:ea typeface="Arial"/>
+                <a:cs typeface="Arial"/>
+                <a:sym typeface="Arial"/>
+              </a:defRPr>
+            </a:lvl6pPr>
+            <a:lvl7pPr marR="0" lvl="6" algn="l" rtl="0">
+              <a:lnSpc>
+                <a:spcPct val="100000"/>
+              </a:lnSpc>
+              <a:spcBef>
+                <a:spcPts val="0"/>
+              </a:spcBef>
+              <a:spcAft>
+                <a:spcPts val="0"/>
+              </a:spcAft>
+              <a:buClr>
+                <a:schemeClr val="dk1"/>
+              </a:buClr>
+              <a:buSzPts val="2800"/>
+              <a:buFont typeface="Arial"/>
+              <a:buNone/>
+              <a:defRPr sz="2800" b="0" i="0" u="none" strike="noStrike" cap="none">
+                <a:solidFill>
+                  <a:schemeClr val="dk1"/>
+                </a:solidFill>
+                <a:latin typeface="Arial"/>
+                <a:ea typeface="Arial"/>
+                <a:cs typeface="Arial"/>
+                <a:sym typeface="Arial"/>
+              </a:defRPr>
+            </a:lvl7pPr>
+            <a:lvl8pPr marR="0" lvl="7" algn="l" rtl="0">
+              <a:lnSpc>
+                <a:spcPct val="100000"/>
+              </a:lnSpc>
+              <a:spcBef>
+                <a:spcPts val="0"/>
+              </a:spcBef>
+              <a:spcAft>
+                <a:spcPts val="0"/>
+              </a:spcAft>
+              <a:buClr>
+                <a:schemeClr val="dk1"/>
+              </a:buClr>
+              <a:buSzPts val="2800"/>
+              <a:buFont typeface="Arial"/>
+              <a:buNone/>
+              <a:defRPr sz="2800" b="0" i="0" u="none" strike="noStrike" cap="none">
+                <a:solidFill>
+                  <a:schemeClr val="dk1"/>
+                </a:solidFill>
+                <a:latin typeface="Arial"/>
+                <a:ea typeface="Arial"/>
+                <a:cs typeface="Arial"/>
+                <a:sym typeface="Arial"/>
+              </a:defRPr>
+            </a:lvl8pPr>
+            <a:lvl9pPr marR="0" lvl="8" algn="l" rtl="0">
+              <a:lnSpc>
+                <a:spcPct val="100000"/>
+              </a:lnSpc>
+              <a:spcBef>
+                <a:spcPts val="0"/>
+              </a:spcBef>
+              <a:spcAft>
+                <a:spcPts val="0"/>
+              </a:spcAft>
+              <a:buClr>
+                <a:schemeClr val="dk1"/>
+              </a:buClr>
+              <a:buSzPts val="2800"/>
+              <a:buFont typeface="Arial"/>
+              <a:buNone/>
+              <a:defRPr sz="2800" b="0" i="0" u="none" strike="noStrike" cap="none">
+                <a:solidFill>
+                  <a:schemeClr val="dk1"/>
+                </a:solidFill>
+                <a:latin typeface="Arial"/>
+                <a:ea typeface="Arial"/>
+                <a:cs typeface="Arial"/>
+                <a:sym typeface="Arial"/>
+              </a:defRPr>
+            </a:lvl9pPr>
+          </a:lstStyle>
+          <a:p>
+            <a:pPr>
+              <a:buSzPts val="990"/>
+            </a:pPr>
+            <a:r>
+              <a:rPr lang="it-IT" sz="2820" dirty="0"/>
+              <a:t>Importanza Feature</a:t>
+            </a:r>
+          </a:p>
+        </p:txBody>
+      </p:sp>
     </p:spTree>
     <p:extLst>
       <p:ext uri="{BB962C8B-B14F-4D97-AF65-F5344CB8AC3E}">
@@ -8310,29 +9107,288 @@
       </p:grpSpPr>
       <p:sp>
         <p:nvSpPr>
-          <p:cNvPr id="2" name="Titolo 1">
+          <p:cNvPr id="4" name="Google Shape;74;p16">
             <a:extLst>
               <a:ext uri="{FF2B5EF4-FFF2-40B4-BE49-F238E27FC236}">
-                <a16:creationId xmlns:a16="http://schemas.microsoft.com/office/drawing/2014/main" id="{E9575FCC-A50B-D088-5394-3C4A70869602}"/>
+                <a16:creationId xmlns:a16="http://schemas.microsoft.com/office/drawing/2014/main" id="{89CC2956-B464-3007-BA03-77F9F82AAF01}"/>
               </a:ext>
             </a:extLst>
           </p:cNvPr>
-          <p:cNvSpPr>
-            <a:spLocks noGrp="1"/>
+          <p:cNvSpPr txBox="1">
+            <a:spLocks/>
           </p:cNvSpPr>
-          <p:nvPr>
-            <p:ph type="title"/>
-          </p:nvPr>
+          <p:nvPr/>
         </p:nvSpPr>
-        <p:spPr/>
+        <p:spPr>
+          <a:xfrm>
+            <a:off x="311700" y="305400"/>
+            <a:ext cx="8520600" cy="572700"/>
+          </a:xfrm>
+          <a:prstGeom prst="rect">
+            <a:avLst/>
+          </a:prstGeom>
+          <a:noFill/>
+          <a:ln>
+            <a:noFill/>
+          </a:ln>
+        </p:spPr>
         <p:txBody>
-          <a:bodyPr>
-            <a:normAutofit fontScale="90000"/>
+          <a:bodyPr spcFirstLastPara="1" wrap="square" lIns="91425" tIns="91425" rIns="91425" bIns="91425" anchor="t" anchorCtr="0">
+            <a:noAutofit/>
           </a:bodyPr>
-          <a:lstStyle/>
+          <a:lstStyle>
+            <a:defPPr marR="0" lvl="0" algn="l" rtl="0">
+              <a:lnSpc>
+                <a:spcPct val="100000"/>
+              </a:lnSpc>
+              <a:spcBef>
+                <a:spcPts val="0"/>
+              </a:spcBef>
+              <a:spcAft>
+                <a:spcPts val="0"/>
+              </a:spcAft>
+            </a:defPPr>
+            <a:lvl1pPr marR="0" lvl="0" algn="l" rtl="0">
+              <a:lnSpc>
+                <a:spcPct val="100000"/>
+              </a:lnSpc>
+              <a:spcBef>
+                <a:spcPts val="0"/>
+              </a:spcBef>
+              <a:spcAft>
+                <a:spcPts val="0"/>
+              </a:spcAft>
+              <a:buClr>
+                <a:schemeClr val="dk1"/>
+              </a:buClr>
+              <a:buSzPts val="2800"/>
+              <a:buFont typeface="Arial"/>
+              <a:buNone/>
+              <a:defRPr sz="2800" b="0" i="0" u="none" strike="noStrike" cap="none">
+                <a:solidFill>
+                  <a:schemeClr val="dk1"/>
+                </a:solidFill>
+                <a:latin typeface="Arial"/>
+                <a:ea typeface="Arial"/>
+                <a:cs typeface="Arial"/>
+                <a:sym typeface="Arial"/>
+              </a:defRPr>
+            </a:lvl1pPr>
+            <a:lvl2pPr marR="0" lvl="1" algn="l" rtl="0">
+              <a:lnSpc>
+                <a:spcPct val="100000"/>
+              </a:lnSpc>
+              <a:spcBef>
+                <a:spcPts val="0"/>
+              </a:spcBef>
+              <a:spcAft>
+                <a:spcPts val="0"/>
+              </a:spcAft>
+              <a:buClr>
+                <a:schemeClr val="dk1"/>
+              </a:buClr>
+              <a:buSzPts val="2800"/>
+              <a:buFont typeface="Arial"/>
+              <a:buNone/>
+              <a:defRPr sz="2800" b="0" i="0" u="none" strike="noStrike" cap="none">
+                <a:solidFill>
+                  <a:schemeClr val="dk1"/>
+                </a:solidFill>
+                <a:latin typeface="Arial"/>
+                <a:ea typeface="Arial"/>
+                <a:cs typeface="Arial"/>
+                <a:sym typeface="Arial"/>
+              </a:defRPr>
+            </a:lvl2pPr>
+            <a:lvl3pPr marR="0" lvl="2" algn="l" rtl="0">
+              <a:lnSpc>
+                <a:spcPct val="100000"/>
+              </a:lnSpc>
+              <a:spcBef>
+                <a:spcPts val="0"/>
+              </a:spcBef>
+              <a:spcAft>
+                <a:spcPts val="0"/>
+              </a:spcAft>
+              <a:buClr>
+                <a:schemeClr val="dk1"/>
+              </a:buClr>
+              <a:buSzPts val="2800"/>
+              <a:buFont typeface="Arial"/>
+              <a:buNone/>
+              <a:defRPr sz="2800" b="0" i="0" u="none" strike="noStrike" cap="none">
+                <a:solidFill>
+                  <a:schemeClr val="dk1"/>
+                </a:solidFill>
+                <a:latin typeface="Arial"/>
+                <a:ea typeface="Arial"/>
+                <a:cs typeface="Arial"/>
+                <a:sym typeface="Arial"/>
+              </a:defRPr>
+            </a:lvl3pPr>
+            <a:lvl4pPr marR="0" lvl="3" algn="l" rtl="0">
+              <a:lnSpc>
+                <a:spcPct val="100000"/>
+              </a:lnSpc>
+              <a:spcBef>
+                <a:spcPts val="0"/>
+              </a:spcBef>
+              <a:spcAft>
+                <a:spcPts val="0"/>
+              </a:spcAft>
+              <a:buClr>
+                <a:schemeClr val="dk1"/>
+              </a:buClr>
+              <a:buSzPts val="2800"/>
+              <a:buFont typeface="Arial"/>
+              <a:buNone/>
+              <a:defRPr sz="2800" b="0" i="0" u="none" strike="noStrike" cap="none">
+                <a:solidFill>
+                  <a:schemeClr val="dk1"/>
+                </a:solidFill>
+                <a:latin typeface="Arial"/>
+                <a:ea typeface="Arial"/>
+                <a:cs typeface="Arial"/>
+                <a:sym typeface="Arial"/>
+              </a:defRPr>
+            </a:lvl4pPr>
+            <a:lvl5pPr marR="0" lvl="4" algn="l" rtl="0">
+              <a:lnSpc>
+                <a:spcPct val="100000"/>
+              </a:lnSpc>
+              <a:spcBef>
+                <a:spcPts val="0"/>
+              </a:spcBef>
+              <a:spcAft>
+                <a:spcPts val="0"/>
+              </a:spcAft>
+              <a:buClr>
+                <a:schemeClr val="dk1"/>
+              </a:buClr>
+              <a:buSzPts val="2800"/>
+              <a:buFont typeface="Arial"/>
+              <a:buNone/>
+              <a:defRPr sz="2800" b="0" i="0" u="none" strike="noStrike" cap="none">
+                <a:solidFill>
+                  <a:schemeClr val="dk1"/>
+                </a:solidFill>
+                <a:latin typeface="Arial"/>
+                <a:ea typeface="Arial"/>
+                <a:cs typeface="Arial"/>
+                <a:sym typeface="Arial"/>
+              </a:defRPr>
+            </a:lvl5pPr>
+            <a:lvl6pPr marR="0" lvl="5" algn="l" rtl="0">
+              <a:lnSpc>
+                <a:spcPct val="100000"/>
+              </a:lnSpc>
+              <a:spcBef>
+                <a:spcPts val="0"/>
+              </a:spcBef>
+              <a:spcAft>
+                <a:spcPts val="0"/>
+              </a:spcAft>
+              <a:buClr>
+                <a:schemeClr val="dk1"/>
+              </a:buClr>
+              <a:buSzPts val="2800"/>
+              <a:buFont typeface="Arial"/>
+              <a:buNone/>
+              <a:defRPr sz="2800" b="0" i="0" u="none" strike="noStrike" cap="none">
+                <a:solidFill>
+                  <a:schemeClr val="dk1"/>
+                </a:solidFill>
+                <a:latin typeface="Arial"/>
+                <a:ea typeface="Arial"/>
+                <a:cs typeface="Arial"/>
+                <a:sym typeface="Arial"/>
+              </a:defRPr>
+            </a:lvl6pPr>
+            <a:lvl7pPr marR="0" lvl="6" algn="l" rtl="0">
+              <a:lnSpc>
+                <a:spcPct val="100000"/>
+              </a:lnSpc>
+              <a:spcBef>
+                <a:spcPts val="0"/>
+              </a:spcBef>
+              <a:spcAft>
+                <a:spcPts val="0"/>
+              </a:spcAft>
+              <a:buClr>
+                <a:schemeClr val="dk1"/>
+              </a:buClr>
+              <a:buSzPts val="2800"/>
+              <a:buFont typeface="Arial"/>
+              <a:buNone/>
+              <a:defRPr sz="2800" b="0" i="0" u="none" strike="noStrike" cap="none">
+                <a:solidFill>
+                  <a:schemeClr val="dk1"/>
+                </a:solidFill>
+                <a:latin typeface="Arial"/>
+                <a:ea typeface="Arial"/>
+                <a:cs typeface="Arial"/>
+                <a:sym typeface="Arial"/>
+              </a:defRPr>
+            </a:lvl7pPr>
+            <a:lvl8pPr marR="0" lvl="7" algn="l" rtl="0">
+              <a:lnSpc>
+                <a:spcPct val="100000"/>
+              </a:lnSpc>
+              <a:spcBef>
+                <a:spcPts val="0"/>
+              </a:spcBef>
+              <a:spcAft>
+                <a:spcPts val="0"/>
+              </a:spcAft>
+              <a:buClr>
+                <a:schemeClr val="dk1"/>
+              </a:buClr>
+              <a:buSzPts val="2800"/>
+              <a:buFont typeface="Arial"/>
+              <a:buNone/>
+              <a:defRPr sz="2800" b="0" i="0" u="none" strike="noStrike" cap="none">
+                <a:solidFill>
+                  <a:schemeClr val="dk1"/>
+                </a:solidFill>
+                <a:latin typeface="Arial"/>
+                <a:ea typeface="Arial"/>
+                <a:cs typeface="Arial"/>
+                <a:sym typeface="Arial"/>
+              </a:defRPr>
+            </a:lvl8pPr>
+            <a:lvl9pPr marR="0" lvl="8" algn="l" rtl="0">
+              <a:lnSpc>
+                <a:spcPct val="100000"/>
+              </a:lnSpc>
+              <a:spcBef>
+                <a:spcPts val="0"/>
+              </a:spcBef>
+              <a:spcAft>
+                <a:spcPts val="0"/>
+              </a:spcAft>
+              <a:buClr>
+                <a:schemeClr val="dk1"/>
+              </a:buClr>
+              <a:buSzPts val="2800"/>
+              <a:buFont typeface="Arial"/>
+              <a:buNone/>
+              <a:defRPr sz="2800" b="0" i="0" u="none" strike="noStrike" cap="none">
+                <a:solidFill>
+                  <a:schemeClr val="dk1"/>
+                </a:solidFill>
+                <a:latin typeface="Arial"/>
+                <a:ea typeface="Arial"/>
+                <a:cs typeface="Arial"/>
+                <a:sym typeface="Arial"/>
+              </a:defRPr>
+            </a:lvl9pPr>
+          </a:lstStyle>
           <a:p>
+            <a:pPr>
+              <a:buSzPts val="990"/>
+            </a:pPr>
             <a:r>
-              <a:rPr lang="it-IT" dirty="0"/>
+              <a:rPr lang="it-IT" sz="2820" dirty="0"/>
               <a:t>Rumori analizzati</a:t>
             </a:r>
           </a:p>
@@ -8340,24 +9396,282 @@
       </p:sp>
       <p:sp>
         <p:nvSpPr>
-          <p:cNvPr id="3" name="Segnaposto testo 2">
+          <p:cNvPr id="7" name="Google Shape;117;p20">
             <a:extLst>
               <a:ext uri="{FF2B5EF4-FFF2-40B4-BE49-F238E27FC236}">
-                <a16:creationId xmlns:a16="http://schemas.microsoft.com/office/drawing/2014/main" id="{F486E96C-961F-4915-C0A4-D88DB11E66E6}"/>
+                <a16:creationId xmlns:a16="http://schemas.microsoft.com/office/drawing/2014/main" id="{F040A8B3-52A0-BE1C-24E6-846B4E1CC885}"/>
               </a:ext>
             </a:extLst>
           </p:cNvPr>
-          <p:cNvSpPr>
-            <a:spLocks noGrp="1"/>
+          <p:cNvSpPr txBox="1">
+            <a:spLocks/>
           </p:cNvSpPr>
-          <p:nvPr>
-            <p:ph type="body" idx="1"/>
-          </p:nvPr>
+          <p:nvPr/>
         </p:nvSpPr>
-        <p:spPr/>
+        <p:spPr>
+          <a:xfrm>
+            <a:off x="311700" y="988105"/>
+            <a:ext cx="8472900" cy="3617762"/>
+          </a:xfrm>
+          <a:prstGeom prst="rect">
+            <a:avLst/>
+          </a:prstGeom>
+          <a:noFill/>
+          <a:ln>
+            <a:noFill/>
+          </a:ln>
+        </p:spPr>
         <p:txBody>
-          <a:bodyPr/>
-          <a:lstStyle/>
+          <a:bodyPr spcFirstLastPara="1" wrap="square" lIns="91425" tIns="91425" rIns="91425" bIns="91425" anchor="t" anchorCtr="0">
+            <a:normAutofit/>
+          </a:bodyPr>
+          <a:lstStyle>
+            <a:defPPr marR="0" lvl="0" algn="l" rtl="0">
+              <a:lnSpc>
+                <a:spcPct val="100000"/>
+              </a:lnSpc>
+              <a:spcBef>
+                <a:spcPts val="0"/>
+              </a:spcBef>
+              <a:spcAft>
+                <a:spcPts val="0"/>
+              </a:spcAft>
+            </a:defPPr>
+            <a:lvl1pPr marL="457200" marR="0" lvl="0" indent="-342900" algn="l" rtl="0">
+              <a:lnSpc>
+                <a:spcPct val="115000"/>
+              </a:lnSpc>
+              <a:spcBef>
+                <a:spcPts val="0"/>
+              </a:spcBef>
+              <a:spcAft>
+                <a:spcPts val="0"/>
+              </a:spcAft>
+              <a:buClr>
+                <a:schemeClr val="lt2"/>
+              </a:buClr>
+              <a:buSzPts val="1800"/>
+              <a:buFont typeface="Arial"/>
+              <a:buChar char="●"/>
+              <a:defRPr sz="1800" b="0" i="0" u="none" strike="noStrike" cap="none">
+                <a:solidFill>
+                  <a:schemeClr val="lt2"/>
+                </a:solidFill>
+                <a:latin typeface="Arial"/>
+                <a:ea typeface="Arial"/>
+                <a:cs typeface="Arial"/>
+                <a:sym typeface="Arial"/>
+              </a:defRPr>
+            </a:lvl1pPr>
+            <a:lvl2pPr marL="914400" marR="0" lvl="1" indent="-317500" algn="l" rtl="0">
+              <a:lnSpc>
+                <a:spcPct val="115000"/>
+              </a:lnSpc>
+              <a:spcBef>
+                <a:spcPts val="0"/>
+              </a:spcBef>
+              <a:spcAft>
+                <a:spcPts val="0"/>
+              </a:spcAft>
+              <a:buClr>
+                <a:schemeClr val="lt2"/>
+              </a:buClr>
+              <a:buSzPts val="1400"/>
+              <a:buFont typeface="Arial"/>
+              <a:buChar char="○"/>
+              <a:defRPr sz="1400" b="0" i="0" u="none" strike="noStrike" cap="none">
+                <a:solidFill>
+                  <a:schemeClr val="lt2"/>
+                </a:solidFill>
+                <a:latin typeface="Arial"/>
+                <a:ea typeface="Arial"/>
+                <a:cs typeface="Arial"/>
+                <a:sym typeface="Arial"/>
+              </a:defRPr>
+            </a:lvl2pPr>
+            <a:lvl3pPr marL="1371600" marR="0" lvl="2" indent="-317500" algn="l" rtl="0">
+              <a:lnSpc>
+                <a:spcPct val="115000"/>
+              </a:lnSpc>
+              <a:spcBef>
+                <a:spcPts val="0"/>
+              </a:spcBef>
+              <a:spcAft>
+                <a:spcPts val="0"/>
+              </a:spcAft>
+              <a:buClr>
+                <a:schemeClr val="lt2"/>
+              </a:buClr>
+              <a:buSzPts val="1400"/>
+              <a:buFont typeface="Arial"/>
+              <a:buChar char="■"/>
+              <a:defRPr sz="1400" b="0" i="0" u="none" strike="noStrike" cap="none">
+                <a:solidFill>
+                  <a:schemeClr val="lt2"/>
+                </a:solidFill>
+                <a:latin typeface="Arial"/>
+                <a:ea typeface="Arial"/>
+                <a:cs typeface="Arial"/>
+                <a:sym typeface="Arial"/>
+              </a:defRPr>
+            </a:lvl3pPr>
+            <a:lvl4pPr marL="1828800" marR="0" lvl="3" indent="-317500" algn="l" rtl="0">
+              <a:lnSpc>
+                <a:spcPct val="115000"/>
+              </a:lnSpc>
+              <a:spcBef>
+                <a:spcPts val="0"/>
+              </a:spcBef>
+              <a:spcAft>
+                <a:spcPts val="0"/>
+              </a:spcAft>
+              <a:buClr>
+                <a:schemeClr val="lt2"/>
+              </a:buClr>
+              <a:buSzPts val="1400"/>
+              <a:buFont typeface="Arial"/>
+              <a:buChar char="●"/>
+              <a:defRPr sz="1400" b="0" i="0" u="none" strike="noStrike" cap="none">
+                <a:solidFill>
+                  <a:schemeClr val="lt2"/>
+                </a:solidFill>
+                <a:latin typeface="Arial"/>
+                <a:ea typeface="Arial"/>
+                <a:cs typeface="Arial"/>
+                <a:sym typeface="Arial"/>
+              </a:defRPr>
+            </a:lvl4pPr>
+            <a:lvl5pPr marL="2286000" marR="0" lvl="4" indent="-317500" algn="l" rtl="0">
+              <a:lnSpc>
+                <a:spcPct val="115000"/>
+              </a:lnSpc>
+              <a:spcBef>
+                <a:spcPts val="0"/>
+              </a:spcBef>
+              <a:spcAft>
+                <a:spcPts val="0"/>
+              </a:spcAft>
+              <a:buClr>
+                <a:schemeClr val="lt2"/>
+              </a:buClr>
+              <a:buSzPts val="1400"/>
+              <a:buFont typeface="Arial"/>
+              <a:buChar char="○"/>
+              <a:defRPr sz="1400" b="0" i="0" u="none" strike="noStrike" cap="none">
+                <a:solidFill>
+                  <a:schemeClr val="lt2"/>
+                </a:solidFill>
+                <a:latin typeface="Arial"/>
+                <a:ea typeface="Arial"/>
+                <a:cs typeface="Arial"/>
+                <a:sym typeface="Arial"/>
+              </a:defRPr>
+            </a:lvl5pPr>
+            <a:lvl6pPr marL="2743200" marR="0" lvl="5" indent="-317500" algn="l" rtl="0">
+              <a:lnSpc>
+                <a:spcPct val="115000"/>
+              </a:lnSpc>
+              <a:spcBef>
+                <a:spcPts val="0"/>
+              </a:spcBef>
+              <a:spcAft>
+                <a:spcPts val="0"/>
+              </a:spcAft>
+              <a:buClr>
+                <a:schemeClr val="lt2"/>
+              </a:buClr>
+              <a:buSzPts val="1400"/>
+              <a:buFont typeface="Arial"/>
+              <a:buChar char="■"/>
+              <a:defRPr sz="1400" b="0" i="0" u="none" strike="noStrike" cap="none">
+                <a:solidFill>
+                  <a:schemeClr val="lt2"/>
+                </a:solidFill>
+                <a:latin typeface="Arial"/>
+                <a:ea typeface="Arial"/>
+                <a:cs typeface="Arial"/>
+                <a:sym typeface="Arial"/>
+              </a:defRPr>
+            </a:lvl6pPr>
+            <a:lvl7pPr marL="3200400" marR="0" lvl="6" indent="-317500" algn="l" rtl="0">
+              <a:lnSpc>
+                <a:spcPct val="115000"/>
+              </a:lnSpc>
+              <a:spcBef>
+                <a:spcPts val="0"/>
+              </a:spcBef>
+              <a:spcAft>
+                <a:spcPts val="0"/>
+              </a:spcAft>
+              <a:buClr>
+                <a:schemeClr val="lt2"/>
+              </a:buClr>
+              <a:buSzPts val="1400"/>
+              <a:buFont typeface="Arial"/>
+              <a:buChar char="●"/>
+              <a:defRPr sz="1400" b="0" i="0" u="none" strike="noStrike" cap="none">
+                <a:solidFill>
+                  <a:schemeClr val="lt2"/>
+                </a:solidFill>
+                <a:latin typeface="Arial"/>
+                <a:ea typeface="Arial"/>
+                <a:cs typeface="Arial"/>
+                <a:sym typeface="Arial"/>
+              </a:defRPr>
+            </a:lvl7pPr>
+            <a:lvl8pPr marL="3657600" marR="0" lvl="7" indent="-317500" algn="l" rtl="0">
+              <a:lnSpc>
+                <a:spcPct val="115000"/>
+              </a:lnSpc>
+              <a:spcBef>
+                <a:spcPts val="0"/>
+              </a:spcBef>
+              <a:spcAft>
+                <a:spcPts val="0"/>
+              </a:spcAft>
+              <a:buClr>
+                <a:schemeClr val="lt2"/>
+              </a:buClr>
+              <a:buSzPts val="1400"/>
+              <a:buFont typeface="Arial"/>
+              <a:buChar char="○"/>
+              <a:defRPr sz="1400" b="0" i="0" u="none" strike="noStrike" cap="none">
+                <a:solidFill>
+                  <a:schemeClr val="lt2"/>
+                </a:solidFill>
+                <a:latin typeface="Arial"/>
+                <a:ea typeface="Arial"/>
+                <a:cs typeface="Arial"/>
+                <a:sym typeface="Arial"/>
+              </a:defRPr>
+            </a:lvl8pPr>
+            <a:lvl9pPr marL="4114800" marR="0" lvl="8" indent="-317500" algn="l" rtl="0">
+              <a:lnSpc>
+                <a:spcPct val="115000"/>
+              </a:lnSpc>
+              <a:spcBef>
+                <a:spcPts val="0"/>
+              </a:spcBef>
+              <a:spcAft>
+                <a:spcPts val="0"/>
+              </a:spcAft>
+              <a:buClr>
+                <a:schemeClr val="lt2"/>
+              </a:buClr>
+              <a:buSzPts val="1400"/>
+              <a:buFont typeface="Arial"/>
+              <a:buChar char="■"/>
+              <a:defRPr sz="1400" b="0" i="0" u="none" strike="noStrike" cap="none">
+                <a:solidFill>
+                  <a:schemeClr val="lt2"/>
+                </a:solidFill>
+                <a:latin typeface="Arial"/>
+                <a:ea typeface="Arial"/>
+                <a:cs typeface="Arial"/>
+                <a:sym typeface="Arial"/>
+              </a:defRPr>
+            </a:lvl9pPr>
+          </a:lstStyle>
           <a:p>
             <a:r>
               <a:rPr lang="it-IT" dirty="0"/>
@@ -8365,22 +9679,18 @@
             </a:r>
             <a:r>
               <a:rPr lang="it-IT" dirty="0" err="1"/>
-              <a:t>flipping</a:t>
+              <a:t>Flipping</a:t>
             </a:r>
             <a:endParaRPr lang="it-IT" dirty="0"/>
           </a:p>
           <a:p>
             <a:r>
-              <a:rPr lang="it-IT" dirty="0" err="1"/>
-              <a:t>Gaussian</a:t>
-            </a:r>
-            <a:r>
               <a:rPr lang="it-IT" dirty="0"/>
-              <a:t> </a:t>
+              <a:t>Gaussian </a:t>
             </a:r>
             <a:r>
               <a:rPr lang="it-IT" dirty="0" err="1"/>
-              <a:t>noise</a:t>
+              <a:t>Noise</a:t>
             </a:r>
             <a:endParaRPr lang="it-IT" dirty="0"/>
           </a:p>
@@ -8391,7 +9701,7 @@
             </a:r>
             <a:r>
               <a:rPr lang="it-IT" dirty="0"/>
-              <a:t> injection</a:t>
+              <a:t> Injection</a:t>
             </a:r>
           </a:p>
           <a:p>
@@ -8401,25 +9711,25 @@
             </a:r>
             <a:r>
               <a:rPr lang="it-IT" dirty="0"/>
-              <a:t> feature</a:t>
+              <a:t> Features</a:t>
             </a:r>
           </a:p>
           <a:p>
             <a:r>
               <a:rPr lang="it-IT" dirty="0"/>
-              <a:t>Data drift</a:t>
+              <a:t>Data Drift</a:t>
             </a:r>
           </a:p>
           <a:p>
             <a:r>
               <a:rPr lang="it-IT" dirty="0"/>
-              <a:t>Random feature drop</a:t>
+              <a:t>Random Feature Drop</a:t>
             </a:r>
           </a:p>
           <a:p>
             <a:r>
               <a:rPr lang="it-IT" dirty="0"/>
-              <a:t>Top K drop</a:t>
+              <a:t>Top-K Drop</a:t>
             </a:r>
           </a:p>
           <a:p>
@@ -8438,15 +9748,7 @@
             </a:pPr>
             <a:r>
               <a:rPr lang="it-IT" dirty="0"/>
-              <a:t>Implementati tramite libreria </a:t>
-            </a:r>
-            <a:r>
-              <a:rPr lang="it-IT" dirty="0" err="1"/>
-              <a:t>pucktrick</a:t>
-            </a:r>
-            <a:r>
-              <a:rPr lang="it-IT" dirty="0"/>
-              <a:t>.</a:t>
+              <a:t>Implementati tramite libreria Pucktrick.</a:t>
             </a:r>
           </a:p>
         </p:txBody>
@@ -8550,6 +9852,9 @@
           <a:lstStyle/>
           <a:p>
             <a:pPr marL="0" lvl="0" indent="0" algn="l" rtl="0">
+              <a:lnSpc>
+                <a:spcPct val="100000"/>
+              </a:lnSpc>
               <a:spcBef>
                 <a:spcPts val="0"/>
               </a:spcBef>
@@ -8560,12 +9865,15 @@
             </a:pPr>
             <a:r>
               <a:rPr lang="it" dirty="0"/>
-              <a:t>Valutando tutti i modelli abbiamo scelto di utilizzare le reti neurali e le Support Vector Machines e la random forest.</a:t>
+              <a:t>Valutando tutti i modelli abbiamo scelto di utilizzare le Reti Neurali (MLP), le Support Vector Machines e la Random Forest.</a:t>
             </a:r>
             <a:endParaRPr lang="it-IT" dirty="0"/>
           </a:p>
           <a:p>
             <a:pPr marL="0" lvl="0" indent="0" algn="l" rtl="0">
+              <a:lnSpc>
+                <a:spcPct val="100000"/>
+              </a:lnSpc>
               <a:spcBef>
                 <a:spcPts val="1200"/>
               </a:spcBef>
@@ -8576,7 +9884,7 @@
             </a:pPr>
             <a:r>
               <a:rPr lang="it-IT" dirty="0"/>
-              <a:t>Le reti neurali e le Support </a:t>
+              <a:t>Le MLP e le Support </a:t>
             </a:r>
             <a:r>
               <a:rPr lang="it-IT" dirty="0" err="1"/>
@@ -8584,7 +9892,22 @@
             </a:r>
             <a:r>
               <a:rPr lang="it-IT" dirty="0"/>
-              <a:t> Machines riescono a gestire bene i valori numerici, particolarmente per la natura binaria del risultato, per cui abbiamo deciso di utilizzare questi modelli.</a:t>
+              <a:t> Machines riescono a gestire bene i valori numerici, particolarmente per la natura binaria del risultato.</a:t>
+            </a:r>
+          </a:p>
+          <a:p>
+            <a:pPr marL="0" lvl="0" indent="0" algn="l" rtl="0">
+              <a:lnSpc>
+                <a:spcPct val="100000"/>
+              </a:lnSpc>
+              <a:spcAft>
+                <a:spcPts val="1200"/>
+              </a:spcAft>
+              <a:buNone/>
+            </a:pPr>
+            <a:r>
+              <a:rPr lang="it-IT" dirty="0"/>
+              <a:t>La Random Forest è stata scelta per la sua capacità di resistere al rumore.</a:t>
             </a:r>
           </a:p>
         </p:txBody>
@@ -8604,19 +9927,22 @@
           <p:nvPr/>
         </p:nvPicPr>
         <p:blipFill>
-          <a:blip r:embed="rId3"/>
+          <a:blip r:embed="rId3">
+            <a:alphaModFix/>
+          </a:blip>
           <a:stretch>
             <a:fillRect/>
           </a:stretch>
         </p:blipFill>
         <p:spPr>
           <a:xfrm>
-            <a:off x="1011359" y="3148604"/>
-            <a:ext cx="6525536" cy="1448002"/>
+            <a:off x="619902" y="3032515"/>
+            <a:ext cx="7856496" cy="1743339"/>
           </a:xfrm>
           <a:prstGeom prst="rect">
             <a:avLst/>
           </a:prstGeom>
+          <a:noFill/>
         </p:spPr>
       </p:pic>
     </p:spTree>
@@ -8689,34 +10015,288 @@
       </p:sp>
       <p:sp>
         <p:nvSpPr>
-          <p:cNvPr id="86" name="Google Shape;86;p17"/>
+          <p:cNvPr id="3" name="Google Shape;117;p20">
+            <a:extLst>
+              <a:ext uri="{FF2B5EF4-FFF2-40B4-BE49-F238E27FC236}">
+                <a16:creationId xmlns:a16="http://schemas.microsoft.com/office/drawing/2014/main" id="{2F69ABE4-AC3B-290C-C9E1-0ED2782F0664}"/>
+              </a:ext>
+            </a:extLst>
+          </p:cNvPr>
           <p:cNvSpPr txBox="1">
-            <a:spLocks noGrp="1"/>
+            <a:spLocks/>
           </p:cNvSpPr>
-          <p:nvPr>
-            <p:ph type="body" idx="1"/>
-          </p:nvPr>
+          <p:nvPr/>
         </p:nvSpPr>
         <p:spPr>
           <a:xfrm>
-            <a:off x="311700" y="986400"/>
-            <a:ext cx="7959464" cy="2560800"/>
+            <a:off x="311700" y="988105"/>
+            <a:ext cx="8472900" cy="3499228"/>
           </a:xfrm>
           <a:prstGeom prst="rect">
             <a:avLst/>
           </a:prstGeom>
+          <a:noFill/>
+          <a:ln>
+            <a:noFill/>
+          </a:ln>
         </p:spPr>
         <p:txBody>
-          <a:bodyPr spcFirstLastPara="1" wrap="square" lIns="91425" tIns="91425" rIns="91425" bIns="91425" anchor="t" anchorCtr="0">
-            <a:normAutofit fontScale="92500" lnSpcReduction="20000"/>
+          <a:bodyPr spcFirstLastPara="1" wrap="square" lIns="0" tIns="91425" rIns="91425" bIns="91425" anchor="t" anchorCtr="0">
+            <a:noAutofit/>
           </a:bodyPr>
-          <a:lstStyle/>
+          <a:lstStyle>
+            <a:defPPr marR="0" lvl="0" algn="l" rtl="0">
+              <a:lnSpc>
+                <a:spcPct val="100000"/>
+              </a:lnSpc>
+              <a:spcBef>
+                <a:spcPts val="0"/>
+              </a:spcBef>
+              <a:spcAft>
+                <a:spcPts val="0"/>
+              </a:spcAft>
+            </a:defPPr>
+            <a:lvl1pPr marL="457200" marR="0" lvl="0" indent="-342900" algn="l" rtl="0">
+              <a:lnSpc>
+                <a:spcPct val="115000"/>
+              </a:lnSpc>
+              <a:spcBef>
+                <a:spcPts val="0"/>
+              </a:spcBef>
+              <a:spcAft>
+                <a:spcPts val="0"/>
+              </a:spcAft>
+              <a:buClr>
+                <a:schemeClr val="lt2"/>
+              </a:buClr>
+              <a:buSzPts val="1800"/>
+              <a:buFont typeface="Arial"/>
+              <a:buChar char="●"/>
+              <a:defRPr sz="1800" b="0" i="0" u="none" strike="noStrike" cap="none">
+                <a:solidFill>
+                  <a:schemeClr val="lt2"/>
+                </a:solidFill>
+                <a:latin typeface="Arial"/>
+                <a:ea typeface="Arial"/>
+                <a:cs typeface="Arial"/>
+                <a:sym typeface="Arial"/>
+              </a:defRPr>
+            </a:lvl1pPr>
+            <a:lvl2pPr marL="914400" marR="0" lvl="1" indent="-317500" algn="l" rtl="0">
+              <a:lnSpc>
+                <a:spcPct val="115000"/>
+              </a:lnSpc>
+              <a:spcBef>
+                <a:spcPts val="0"/>
+              </a:spcBef>
+              <a:spcAft>
+                <a:spcPts val="0"/>
+              </a:spcAft>
+              <a:buClr>
+                <a:schemeClr val="lt2"/>
+              </a:buClr>
+              <a:buSzPts val="1400"/>
+              <a:buFont typeface="Arial"/>
+              <a:buChar char="○"/>
+              <a:defRPr sz="1400" b="0" i="0" u="none" strike="noStrike" cap="none">
+                <a:solidFill>
+                  <a:schemeClr val="lt2"/>
+                </a:solidFill>
+                <a:latin typeface="Arial"/>
+                <a:ea typeface="Arial"/>
+                <a:cs typeface="Arial"/>
+                <a:sym typeface="Arial"/>
+              </a:defRPr>
+            </a:lvl2pPr>
+            <a:lvl3pPr marL="1371600" marR="0" lvl="2" indent="-317500" algn="l" rtl="0">
+              <a:lnSpc>
+                <a:spcPct val="115000"/>
+              </a:lnSpc>
+              <a:spcBef>
+                <a:spcPts val="0"/>
+              </a:spcBef>
+              <a:spcAft>
+                <a:spcPts val="0"/>
+              </a:spcAft>
+              <a:buClr>
+                <a:schemeClr val="lt2"/>
+              </a:buClr>
+              <a:buSzPts val="1400"/>
+              <a:buFont typeface="Arial"/>
+              <a:buChar char="■"/>
+              <a:defRPr sz="1400" b="0" i="0" u="none" strike="noStrike" cap="none">
+                <a:solidFill>
+                  <a:schemeClr val="lt2"/>
+                </a:solidFill>
+                <a:latin typeface="Arial"/>
+                <a:ea typeface="Arial"/>
+                <a:cs typeface="Arial"/>
+                <a:sym typeface="Arial"/>
+              </a:defRPr>
+            </a:lvl3pPr>
+            <a:lvl4pPr marL="1828800" marR="0" lvl="3" indent="-317500" algn="l" rtl="0">
+              <a:lnSpc>
+                <a:spcPct val="115000"/>
+              </a:lnSpc>
+              <a:spcBef>
+                <a:spcPts val="0"/>
+              </a:spcBef>
+              <a:spcAft>
+                <a:spcPts val="0"/>
+              </a:spcAft>
+              <a:buClr>
+                <a:schemeClr val="lt2"/>
+              </a:buClr>
+              <a:buSzPts val="1400"/>
+              <a:buFont typeface="Arial"/>
+              <a:buChar char="●"/>
+              <a:defRPr sz="1400" b="0" i="0" u="none" strike="noStrike" cap="none">
+                <a:solidFill>
+                  <a:schemeClr val="lt2"/>
+                </a:solidFill>
+                <a:latin typeface="Arial"/>
+                <a:ea typeface="Arial"/>
+                <a:cs typeface="Arial"/>
+                <a:sym typeface="Arial"/>
+              </a:defRPr>
+            </a:lvl4pPr>
+            <a:lvl5pPr marL="2286000" marR="0" lvl="4" indent="-317500" algn="l" rtl="0">
+              <a:lnSpc>
+                <a:spcPct val="115000"/>
+              </a:lnSpc>
+              <a:spcBef>
+                <a:spcPts val="0"/>
+              </a:spcBef>
+              <a:spcAft>
+                <a:spcPts val="0"/>
+              </a:spcAft>
+              <a:buClr>
+                <a:schemeClr val="lt2"/>
+              </a:buClr>
+              <a:buSzPts val="1400"/>
+              <a:buFont typeface="Arial"/>
+              <a:buChar char="○"/>
+              <a:defRPr sz="1400" b="0" i="0" u="none" strike="noStrike" cap="none">
+                <a:solidFill>
+                  <a:schemeClr val="lt2"/>
+                </a:solidFill>
+                <a:latin typeface="Arial"/>
+                <a:ea typeface="Arial"/>
+                <a:cs typeface="Arial"/>
+                <a:sym typeface="Arial"/>
+              </a:defRPr>
+            </a:lvl5pPr>
+            <a:lvl6pPr marL="2743200" marR="0" lvl="5" indent="-317500" algn="l" rtl="0">
+              <a:lnSpc>
+                <a:spcPct val="115000"/>
+              </a:lnSpc>
+              <a:spcBef>
+                <a:spcPts val="0"/>
+              </a:spcBef>
+              <a:spcAft>
+                <a:spcPts val="0"/>
+              </a:spcAft>
+              <a:buClr>
+                <a:schemeClr val="lt2"/>
+              </a:buClr>
+              <a:buSzPts val="1400"/>
+              <a:buFont typeface="Arial"/>
+              <a:buChar char="■"/>
+              <a:defRPr sz="1400" b="0" i="0" u="none" strike="noStrike" cap="none">
+                <a:solidFill>
+                  <a:schemeClr val="lt2"/>
+                </a:solidFill>
+                <a:latin typeface="Arial"/>
+                <a:ea typeface="Arial"/>
+                <a:cs typeface="Arial"/>
+                <a:sym typeface="Arial"/>
+              </a:defRPr>
+            </a:lvl6pPr>
+            <a:lvl7pPr marL="3200400" marR="0" lvl="6" indent="-317500" algn="l" rtl="0">
+              <a:lnSpc>
+                <a:spcPct val="115000"/>
+              </a:lnSpc>
+              <a:spcBef>
+                <a:spcPts val="0"/>
+              </a:spcBef>
+              <a:spcAft>
+                <a:spcPts val="0"/>
+              </a:spcAft>
+              <a:buClr>
+                <a:schemeClr val="lt2"/>
+              </a:buClr>
+              <a:buSzPts val="1400"/>
+              <a:buFont typeface="Arial"/>
+              <a:buChar char="●"/>
+              <a:defRPr sz="1400" b="0" i="0" u="none" strike="noStrike" cap="none">
+                <a:solidFill>
+                  <a:schemeClr val="lt2"/>
+                </a:solidFill>
+                <a:latin typeface="Arial"/>
+                <a:ea typeface="Arial"/>
+                <a:cs typeface="Arial"/>
+                <a:sym typeface="Arial"/>
+              </a:defRPr>
+            </a:lvl7pPr>
+            <a:lvl8pPr marL="3657600" marR="0" lvl="7" indent="-317500" algn="l" rtl="0">
+              <a:lnSpc>
+                <a:spcPct val="115000"/>
+              </a:lnSpc>
+              <a:spcBef>
+                <a:spcPts val="0"/>
+              </a:spcBef>
+              <a:spcAft>
+                <a:spcPts val="0"/>
+              </a:spcAft>
+              <a:buClr>
+                <a:schemeClr val="lt2"/>
+              </a:buClr>
+              <a:buSzPts val="1400"/>
+              <a:buFont typeface="Arial"/>
+              <a:buChar char="○"/>
+              <a:defRPr sz="1400" b="0" i="0" u="none" strike="noStrike" cap="none">
+                <a:solidFill>
+                  <a:schemeClr val="lt2"/>
+                </a:solidFill>
+                <a:latin typeface="Arial"/>
+                <a:ea typeface="Arial"/>
+                <a:cs typeface="Arial"/>
+                <a:sym typeface="Arial"/>
+              </a:defRPr>
+            </a:lvl8pPr>
+            <a:lvl9pPr marL="4114800" marR="0" lvl="8" indent="-317500" algn="l" rtl="0">
+              <a:lnSpc>
+                <a:spcPct val="115000"/>
+              </a:lnSpc>
+              <a:spcBef>
+                <a:spcPts val="0"/>
+              </a:spcBef>
+              <a:spcAft>
+                <a:spcPts val="0"/>
+              </a:spcAft>
+              <a:buClr>
+                <a:schemeClr val="lt2"/>
+              </a:buClr>
+              <a:buSzPts val="1400"/>
+              <a:buFont typeface="Arial"/>
+              <a:buChar char="■"/>
+              <a:defRPr sz="1400" b="0" i="0" u="none" strike="noStrike" cap="none">
+                <a:solidFill>
+                  <a:schemeClr val="lt2"/>
+                </a:solidFill>
+                <a:latin typeface="Arial"/>
+                <a:ea typeface="Arial"/>
+                <a:cs typeface="Arial"/>
+                <a:sym typeface="Arial"/>
+              </a:defRPr>
+            </a:lvl9pPr>
+          </a:lstStyle>
           <a:p>
             <a:pPr marL="114300" indent="0">
               <a:buNone/>
             </a:pPr>
             <a:r>
-              <a:rPr lang="it-IT" sz="1600" dirty="0"/>
+              <a:rPr lang="it-IT" dirty="0"/>
               <a:t>La pipeline sperimentale adottata introduce una struttura a tre livelli annidati rispetto alla baseline originale.</a:t>
             </a:r>
           </a:p>
@@ -8726,24 +10306,24 @@
               <a:buAutoNum type="arabicPeriod"/>
             </a:pPr>
             <a:r>
-              <a:rPr lang="it-IT" sz="1600" dirty="0"/>
+              <a:rPr lang="it-IT" dirty="0"/>
               <a:t>Il primo livello riguarda la modalità di selezione delle feature (</a:t>
             </a:r>
             <a:r>
-              <a:rPr lang="it-IT" sz="1600" dirty="0" err="1"/>
+              <a:rPr lang="it-IT" dirty="0" err="1"/>
               <a:t>all</a:t>
             </a:r>
             <a:r>
-              <a:rPr lang="it-IT" sz="1600" dirty="0"/>
+              <a:rPr lang="it-IT" dirty="0"/>
               <a:t> features, best 3 features, </a:t>
             </a:r>
             <a:r>
-              <a:rPr lang="it-IT" sz="1600" dirty="0" err="1"/>
+              <a:rPr lang="it-IT" dirty="0" err="1"/>
               <a:t>worst</a:t>
             </a:r>
             <a:r>
-              <a:rPr lang="it-IT" sz="1600" dirty="0"/>
-              <a:t> 3 features)</a:t>
+              <a:rPr lang="it-IT" dirty="0"/>
+              <a:t> 3 features);</a:t>
             </a:r>
           </a:p>
           <a:p>
@@ -8752,8 +10332,8 @@
               <a:buAutoNum type="arabicPeriod"/>
             </a:pPr>
             <a:r>
-              <a:rPr lang="it-IT" sz="1600" dirty="0"/>
-              <a:t>Il secondo livello copre il tipo di corruzione</a:t>
+              <a:rPr lang="it-IT" dirty="0"/>
+              <a:t>Il secondo livello copre il tipo di corruzione;</a:t>
             </a:r>
           </a:p>
           <a:p>
@@ -8762,8 +10342,8 @@
               <a:buAutoNum type="arabicPeriod"/>
             </a:pPr>
             <a:r>
-              <a:rPr lang="it-IT" sz="1600" dirty="0"/>
-              <a:t>Il terzo livello definisce l'intensità di corruzione (19 livelli da 0.05 a 0.95 con step 0.05, più la baseline pulita a livello 0).</a:t>
+              <a:rPr lang="it-IT" dirty="0"/>
+              <a:t>Il terzo livello definisce l'intensità di corruzione (19 livelli da 0.05 a 0.95 con step 0.05, più la baseline pulita a livello 0);</a:t>
             </a:r>
           </a:p>
           <a:p>
@@ -8772,7 +10352,7 @@
               <a:buAutoNum type="arabicPeriod"/>
             </a:pPr>
             <a:r>
-              <a:rPr lang="it-IT" sz="1600" dirty="0"/>
+              <a:rPr lang="it-IT" dirty="0"/>
               <a:t>Ogni casistica iterata 20 volte per stabilità.</a:t>
             </a:r>
           </a:p>
@@ -8781,7 +10361,7 @@
               <a:buFont typeface="+mj-lt"/>
               <a:buAutoNum type="arabicPeriod"/>
             </a:pPr>
-            <a:endParaRPr lang="it-IT" sz="1600" dirty="0"/>
+            <a:endParaRPr lang="it-IT" dirty="0"/>
           </a:p>
           <a:p>
             <a:pPr marL="114300" indent="0">
@@ -8789,13 +10369,8 @@
             </a:pPr>
             <a:r>
               <a:rPr lang="it-IT" dirty="0"/>
-              <a:t>TOTALE: 3 × 8 × 20 × 3 × 20 = 28.800 </a:t>
+              <a:t>TOTALE: 3 × 8 × 20 × 3 × 20 = 28.800 addestramenti.</a:t>
             </a:r>
-            <a:r>
-              <a:rPr lang="it-IT" dirty="0" err="1"/>
-              <a:t>train</a:t>
-            </a:r>
-            <a:endParaRPr sz="1600" dirty="0"/>
           </a:p>
         </p:txBody>
       </p:sp>
@@ -8873,15 +10448,7 @@
             </a:pPr>
             <a:r>
               <a:rPr lang="it-IT" sz="2820" dirty="0"/>
-              <a:t>Risultati best/</a:t>
-            </a:r>
-            <a:r>
-              <a:rPr lang="it-IT" sz="2820" dirty="0" err="1"/>
-              <a:t>worst</a:t>
-            </a:r>
-            <a:r>
-              <a:rPr lang="it-IT" sz="2820" dirty="0"/>
-              <a:t> 3</a:t>
+              <a:t>Risultati Worst e Best 3</a:t>
             </a:r>
           </a:p>
         </p:txBody>
@@ -8908,7 +10475,7 @@
         </p:blipFill>
         <p:spPr>
           <a:xfrm>
-            <a:off x="4572000" y="1535285"/>
+            <a:off x="4580467" y="1476018"/>
             <a:ext cx="4332702" cy="2888198"/>
           </a:xfrm>
           <a:prstGeom prst="rect">
@@ -8938,7 +10505,7 @@
         </p:blipFill>
         <p:spPr>
           <a:xfrm>
-            <a:off x="64492" y="1535285"/>
+            <a:off x="196161" y="1476018"/>
             <a:ext cx="4332701" cy="2888198"/>
           </a:xfrm>
           <a:prstGeom prst="rect">
